--- a/output_pptx/Hark_The_Herald_Angels_Sing.pptx
+++ b/output_pptx/Hark_The_Herald_Angels_Sing.pptx
@@ -3125,8 +3125,8 @@
         </p:nvSpPr>
         <p:spPr>
           <a:xfrm>
-            <a:off x="594360" y="2258568"/>
-            <a:ext cx="11002975" cy="685800"/>
+            <a:off x="640080" y="2052828"/>
+            <a:ext cx="10911535" cy="731520"/>
           </a:xfrm>
           <a:prstGeom prst="rect">
             <a:avLst/>
@@ -3141,7 +3141,7 @@
           <a:p>
             <a:pPr algn="ctr"/>
             <a:r>
-              <a:rPr sz="4400" b="1" i="0">
+              <a:rPr sz="4800" b="1" i="0">
                 <a:solidFill>
                   <a:srgbClr val="FFFFFF"/>
                 </a:solidFill>
@@ -3160,8 +3160,8 @@
         </p:nvSpPr>
         <p:spPr>
           <a:xfrm>
-            <a:off x="594360" y="2980944"/>
-            <a:ext cx="11002975" cy="347472"/>
+            <a:off x="640080" y="2985516"/>
+            <a:ext cx="10911535" cy="731520"/>
           </a:xfrm>
           <a:prstGeom prst="rect">
             <a:avLst/>
@@ -3176,83 +3176,13 @@
           <a:p>
             <a:pPr algn="ctr"/>
             <a:r>
-              <a:rPr sz="2200" b="0" i="1">
-                <a:solidFill>
-                  <a:srgbClr val="8C8C8C"/>
-                </a:solidFill>
-                <a:latin typeface="Arial"/>
-              </a:rPr>
-              <a:t/>
-            </a:r>
-          </a:p>
-        </p:txBody>
-      </p:sp>
-      <p:sp>
-        <p:nvSpPr>
-          <p:cNvPr id="4" name="TextBox 3"/>
-          <p:cNvSpPr txBox="1"/>
-          <p:nvPr/>
-        </p:nvSpPr>
-        <p:spPr>
-          <a:xfrm>
-            <a:off x="594360" y="3529584"/>
-            <a:ext cx="11002975" cy="685800"/>
-          </a:xfrm>
-          <a:prstGeom prst="rect">
-            <a:avLst/>
-          </a:prstGeom>
-          <a:noFill/>
-        </p:spPr>
-        <p:txBody>
-          <a:bodyPr wrap="square">
-            <a:spAutoFit/>
-          </a:bodyPr>
-          <a:lstStyle/>
-          <a:p>
-            <a:pPr algn="ctr"/>
-            <a:r>
-              <a:rPr sz="4266" b="1" i="0">
+              <a:rPr sz="4600" b="1" i="0">
                 <a:solidFill>
                   <a:srgbClr val="FFFFFF"/>
                 </a:solidFill>
                 <a:latin typeface="Arial"/>
               </a:rPr>
               <a:t>Paz na terra e suave misericórdia</a:t>
-            </a:r>
-          </a:p>
-        </p:txBody>
-      </p:sp>
-      <p:sp>
-        <p:nvSpPr>
-          <p:cNvPr id="5" name="TextBox 4"/>
-          <p:cNvSpPr txBox="1"/>
-          <p:nvPr/>
-        </p:nvSpPr>
-        <p:spPr>
-          <a:xfrm>
-            <a:off x="594360" y="4251960"/>
-            <a:ext cx="11002975" cy="347472"/>
-          </a:xfrm>
-          <a:prstGeom prst="rect">
-            <a:avLst/>
-          </a:prstGeom>
-          <a:noFill/>
-        </p:spPr>
-        <p:txBody>
-          <a:bodyPr wrap="square">
-            <a:spAutoFit/>
-          </a:bodyPr>
-          <a:lstStyle/>
-          <a:p>
-            <a:pPr algn="ctr"/>
-            <a:r>
-              <a:rPr sz="2200" b="0" i="1">
-                <a:solidFill>
-                  <a:srgbClr val="8C8C8C"/>
-                </a:solidFill>
-                <a:latin typeface="Arial"/>
-              </a:rPr>
-              <a:t/>
             </a:r>
           </a:p>
         </p:txBody>
@@ -3291,8 +3221,8 @@
         </p:nvSpPr>
         <p:spPr>
           <a:xfrm>
-            <a:off x="594360" y="2258568"/>
-            <a:ext cx="11002975" cy="685800"/>
+            <a:off x="640080" y="2052828"/>
+            <a:ext cx="10911535" cy="731520"/>
           </a:xfrm>
           <a:prstGeom prst="rect">
             <a:avLst/>
@@ -3307,7 +3237,7 @@
           <a:p>
             <a:pPr algn="ctr"/>
             <a:r>
-              <a:rPr sz="4400" b="1" i="0">
+              <a:rPr sz="4800" b="1" i="0">
                 <a:solidFill>
                   <a:srgbClr val="FFFFFF"/>
                 </a:solidFill>
@@ -3326,8 +3256,8 @@
         </p:nvSpPr>
         <p:spPr>
           <a:xfrm>
-            <a:off x="594360" y="2980944"/>
-            <a:ext cx="11002975" cy="347472"/>
+            <a:off x="640080" y="2985516"/>
+            <a:ext cx="10911535" cy="731520"/>
           </a:xfrm>
           <a:prstGeom prst="rect">
             <a:avLst/>
@@ -3342,83 +3272,13 @@
           <a:p>
             <a:pPr algn="ctr"/>
             <a:r>
-              <a:rPr sz="2200" b="0" i="1">
-                <a:solidFill>
-                  <a:srgbClr val="8C8C8C"/>
-                </a:solidFill>
-                <a:latin typeface="Arial"/>
-              </a:rPr>
-              <a:t/>
-            </a:r>
-          </a:p>
-        </p:txBody>
-      </p:sp>
-      <p:sp>
-        <p:nvSpPr>
-          <p:cNvPr id="4" name="TextBox 3"/>
-          <p:cNvSpPr txBox="1"/>
-          <p:nvPr/>
-        </p:nvSpPr>
-        <p:spPr>
-          <a:xfrm>
-            <a:off x="594360" y="3529584"/>
-            <a:ext cx="11002975" cy="685800"/>
-          </a:xfrm>
-          <a:prstGeom prst="rect">
-            <a:avLst/>
-          </a:prstGeom>
-          <a:noFill/>
-        </p:spPr>
-        <p:txBody>
-          <a:bodyPr wrap="square">
-            <a:spAutoFit/>
-          </a:bodyPr>
-          <a:lstStyle/>
-          <a:p>
-            <a:pPr algn="ctr"/>
-            <a:r>
-              <a:rPr sz="4400" b="1" i="0">
+              <a:rPr sz="4800" b="1" i="0">
                 <a:solidFill>
                   <a:srgbClr val="FFFFFF"/>
                 </a:solidFill>
                 <a:latin typeface="Arial"/>
               </a:rPr>
               <a:t>Alegrai-vos, todas as nações</a:t>
-            </a:r>
-          </a:p>
-        </p:txBody>
-      </p:sp>
-      <p:sp>
-        <p:nvSpPr>
-          <p:cNvPr id="5" name="TextBox 4"/>
-          <p:cNvSpPr txBox="1"/>
-          <p:nvPr/>
-        </p:nvSpPr>
-        <p:spPr>
-          <a:xfrm>
-            <a:off x="594360" y="4251960"/>
-            <a:ext cx="11002975" cy="347472"/>
-          </a:xfrm>
-          <a:prstGeom prst="rect">
-            <a:avLst/>
-          </a:prstGeom>
-          <a:noFill/>
-        </p:spPr>
-        <p:txBody>
-          <a:bodyPr wrap="square">
-            <a:spAutoFit/>
-          </a:bodyPr>
-          <a:lstStyle/>
-          <a:p>
-            <a:pPr algn="ctr"/>
-            <a:r>
-              <a:rPr sz="2200" b="0" i="1">
-                <a:solidFill>
-                  <a:srgbClr val="8C8C8C"/>
-                </a:solidFill>
-                <a:latin typeface="Arial"/>
-              </a:rPr>
-              <a:t/>
             </a:r>
           </a:p>
         </p:txBody>
@@ -3457,8 +3317,8 @@
         </p:nvSpPr>
         <p:spPr>
           <a:xfrm>
-            <a:off x="594360" y="2258568"/>
-            <a:ext cx="11002975" cy="685800"/>
+            <a:off x="640080" y="2052828"/>
+            <a:ext cx="10911535" cy="731520"/>
           </a:xfrm>
           <a:prstGeom prst="rect">
             <a:avLst/>
@@ -3473,7 +3333,7 @@
           <a:p>
             <a:pPr algn="ctr"/>
             <a:r>
-              <a:rPr sz="4400" b="1" i="0">
+              <a:rPr sz="4800" b="1" i="0">
                 <a:solidFill>
                   <a:srgbClr val="FFFFFF"/>
                 </a:solidFill>
@@ -3492,8 +3352,8 @@
         </p:nvSpPr>
         <p:spPr>
           <a:xfrm>
-            <a:off x="594360" y="2980944"/>
-            <a:ext cx="11002975" cy="347472"/>
+            <a:off x="640080" y="2985516"/>
+            <a:ext cx="10911535" cy="731520"/>
           </a:xfrm>
           <a:prstGeom prst="rect">
             <a:avLst/>
@@ -3508,83 +3368,13 @@
           <a:p>
             <a:pPr algn="ctr"/>
             <a:r>
-              <a:rPr sz="2200" b="0" i="1">
-                <a:solidFill>
-                  <a:srgbClr val="8C8C8C"/>
-                </a:solidFill>
-                <a:latin typeface="Arial"/>
-              </a:rPr>
-              <a:t/>
-            </a:r>
-          </a:p>
-        </p:txBody>
-      </p:sp>
-      <p:sp>
-        <p:nvSpPr>
-          <p:cNvPr id="4" name="TextBox 3"/>
-          <p:cNvSpPr txBox="1"/>
-          <p:nvPr/>
-        </p:nvSpPr>
-        <p:spPr>
-          <a:xfrm>
-            <a:off x="594360" y="3529584"/>
-            <a:ext cx="11002975" cy="685800"/>
-          </a:xfrm>
-          <a:prstGeom prst="rect">
-            <a:avLst/>
-          </a:prstGeom>
-          <a:noFill/>
-        </p:spPr>
-        <p:txBody>
-          <a:bodyPr wrap="square">
-            <a:spAutoFit/>
-          </a:bodyPr>
-          <a:lstStyle/>
-          <a:p>
-            <a:pPr algn="ctr"/>
-            <a:r>
-              <a:rPr sz="4266" b="1" i="0">
+              <a:rPr sz="4600" b="1" i="0">
                 <a:solidFill>
                   <a:srgbClr val="FFFFFF"/>
                 </a:solidFill>
                 <a:latin typeface="Arial"/>
               </a:rPr>
               <a:t>Paz na terra e suave misericórdia</a:t>
-            </a:r>
-          </a:p>
-        </p:txBody>
-      </p:sp>
-      <p:sp>
-        <p:nvSpPr>
-          <p:cNvPr id="5" name="TextBox 4"/>
-          <p:cNvSpPr txBox="1"/>
-          <p:nvPr/>
-        </p:nvSpPr>
-        <p:spPr>
-          <a:xfrm>
-            <a:off x="594360" y="4251960"/>
-            <a:ext cx="11002975" cy="347472"/>
-          </a:xfrm>
-          <a:prstGeom prst="rect">
-            <a:avLst/>
-          </a:prstGeom>
-          <a:noFill/>
-        </p:spPr>
-        <p:txBody>
-          <a:bodyPr wrap="square">
-            <a:spAutoFit/>
-          </a:bodyPr>
-          <a:lstStyle/>
-          <a:p>
-            <a:pPr algn="ctr"/>
-            <a:r>
-              <a:rPr sz="2200" b="0" i="1">
-                <a:solidFill>
-                  <a:srgbClr val="8C8C8C"/>
-                </a:solidFill>
-                <a:latin typeface="Arial"/>
-              </a:rPr>
-              <a:t/>
             </a:r>
           </a:p>
         </p:txBody>
@@ -3623,8 +3413,8 @@
         </p:nvSpPr>
         <p:spPr>
           <a:xfrm>
-            <a:off x="594360" y="2258568"/>
-            <a:ext cx="11002975" cy="685800"/>
+            <a:off x="640080" y="2052828"/>
+            <a:ext cx="10911535" cy="731520"/>
           </a:xfrm>
           <a:prstGeom prst="rect">
             <a:avLst/>
@@ -3639,7 +3429,7 @@
           <a:p>
             <a:pPr algn="ctr"/>
             <a:r>
-              <a:rPr sz="4400" b="1" i="0">
+              <a:rPr sz="4800" b="1" i="0">
                 <a:solidFill>
                   <a:srgbClr val="FFFFFF"/>
                 </a:solidFill>
@@ -3658,8 +3448,8 @@
         </p:nvSpPr>
         <p:spPr>
           <a:xfrm>
-            <a:off x="594360" y="2980944"/>
-            <a:ext cx="11002975" cy="347472"/>
+            <a:off x="640080" y="2985516"/>
+            <a:ext cx="10911535" cy="731520"/>
           </a:xfrm>
           <a:prstGeom prst="rect">
             <a:avLst/>
@@ -3674,83 +3464,13 @@
           <a:p>
             <a:pPr algn="ctr"/>
             <a:r>
-              <a:rPr sz="2200" b="0" i="1">
-                <a:solidFill>
-                  <a:srgbClr val="8C8C8C"/>
-                </a:solidFill>
-                <a:latin typeface="Arial"/>
-              </a:rPr>
-              <a:t/>
-            </a:r>
-          </a:p>
-        </p:txBody>
-      </p:sp>
-      <p:sp>
-        <p:nvSpPr>
-          <p:cNvPr id="4" name="TextBox 3"/>
-          <p:cNvSpPr txBox="1"/>
-          <p:nvPr/>
-        </p:nvSpPr>
-        <p:spPr>
-          <a:xfrm>
-            <a:off x="594360" y="3529584"/>
-            <a:ext cx="11002975" cy="685800"/>
-          </a:xfrm>
-          <a:prstGeom prst="rect">
-            <a:avLst/>
-          </a:prstGeom>
-          <a:noFill/>
-        </p:spPr>
-        <p:txBody>
-          <a:bodyPr wrap="square">
-            <a:spAutoFit/>
-          </a:bodyPr>
-          <a:lstStyle/>
-          <a:p>
-            <a:pPr algn="ctr"/>
-            <a:r>
-              <a:rPr sz="4400" b="1" i="0">
+              <a:rPr sz="4800" b="1" i="0">
                 <a:solidFill>
                   <a:srgbClr val="FFFFFF"/>
                 </a:solidFill>
                 <a:latin typeface="Arial"/>
               </a:rPr>
               <a:t>Alegrai-vos, todas as nações</a:t>
-            </a:r>
-          </a:p>
-        </p:txBody>
-      </p:sp>
-      <p:sp>
-        <p:nvSpPr>
-          <p:cNvPr id="5" name="TextBox 4"/>
-          <p:cNvSpPr txBox="1"/>
-          <p:nvPr/>
-        </p:nvSpPr>
-        <p:spPr>
-          <a:xfrm>
-            <a:off x="594360" y="4251960"/>
-            <a:ext cx="11002975" cy="347472"/>
-          </a:xfrm>
-          <a:prstGeom prst="rect">
-            <a:avLst/>
-          </a:prstGeom>
-          <a:noFill/>
-        </p:spPr>
-        <p:txBody>
-          <a:bodyPr wrap="square">
-            <a:spAutoFit/>
-          </a:bodyPr>
-          <a:lstStyle/>
-          <a:p>
-            <a:pPr algn="ctr"/>
-            <a:r>
-              <a:rPr sz="2200" b="0" i="1">
-                <a:solidFill>
-                  <a:srgbClr val="8C8C8C"/>
-                </a:solidFill>
-                <a:latin typeface="Arial"/>
-              </a:rPr>
-              <a:t/>
             </a:r>
           </a:p>
         </p:txBody>
@@ -3789,8 +3509,8 @@
         </p:nvSpPr>
         <p:spPr>
           <a:xfrm>
-            <a:off x="594360" y="2258568"/>
-            <a:ext cx="11002975" cy="685800"/>
+            <a:off x="640080" y="2052828"/>
+            <a:ext cx="10911535" cy="731520"/>
           </a:xfrm>
           <a:prstGeom prst="rect">
             <a:avLst/>
@@ -3805,7 +3525,7 @@
           <a:p>
             <a:pPr algn="ctr"/>
             <a:r>
-              <a:rPr sz="4400" b="1" i="0">
+              <a:rPr sz="4800" b="1" i="0">
                 <a:solidFill>
                   <a:srgbClr val="FFFFFF"/>
                 </a:solidFill>
@@ -3824,8 +3544,8 @@
         </p:nvSpPr>
         <p:spPr>
           <a:xfrm>
-            <a:off x="594360" y="2980944"/>
-            <a:ext cx="11002975" cy="347472"/>
+            <a:off x="640080" y="2985516"/>
+            <a:ext cx="10911535" cy="731520"/>
           </a:xfrm>
           <a:prstGeom prst="rect">
             <a:avLst/>
@@ -3840,83 +3560,13 @@
           <a:p>
             <a:pPr algn="ctr"/>
             <a:r>
-              <a:rPr sz="2200" b="0" i="1">
-                <a:solidFill>
-                  <a:srgbClr val="8C8C8C"/>
-                </a:solidFill>
-                <a:latin typeface="Arial"/>
-              </a:rPr>
-              <a:t/>
-            </a:r>
-          </a:p>
-        </p:txBody>
-      </p:sp>
-      <p:sp>
-        <p:nvSpPr>
-          <p:cNvPr id="4" name="TextBox 3"/>
-          <p:cNvSpPr txBox="1"/>
-          <p:nvPr/>
-        </p:nvSpPr>
-        <p:spPr>
-          <a:xfrm>
-            <a:off x="594360" y="3529584"/>
-            <a:ext cx="11002975" cy="685800"/>
-          </a:xfrm>
-          <a:prstGeom prst="rect">
-            <a:avLst/>
-          </a:prstGeom>
-          <a:noFill/>
-        </p:spPr>
-        <p:txBody>
-          <a:bodyPr wrap="square">
-            <a:spAutoFit/>
-          </a:bodyPr>
-          <a:lstStyle/>
-          <a:p>
-            <a:pPr algn="ctr"/>
-            <a:r>
-              <a:rPr sz="4141" b="1" i="0">
+              <a:rPr sz="4500" b="1" i="0">
                 <a:solidFill>
                   <a:srgbClr val="FFFFFF"/>
                 </a:solidFill>
                 <a:latin typeface="Arial"/>
               </a:rPr>
               <a:t>Com as hostes angelicais proclamai</a:t>
-            </a:r>
-          </a:p>
-        </p:txBody>
-      </p:sp>
-      <p:sp>
-        <p:nvSpPr>
-          <p:cNvPr id="5" name="TextBox 4"/>
-          <p:cNvSpPr txBox="1"/>
-          <p:nvPr/>
-        </p:nvSpPr>
-        <p:spPr>
-          <a:xfrm>
-            <a:off x="594360" y="4251960"/>
-            <a:ext cx="11002975" cy="347472"/>
-          </a:xfrm>
-          <a:prstGeom prst="rect">
-            <a:avLst/>
-          </a:prstGeom>
-          <a:noFill/>
-        </p:spPr>
-        <p:txBody>
-          <a:bodyPr wrap="square">
-            <a:spAutoFit/>
-          </a:bodyPr>
-          <a:lstStyle/>
-          <a:p>
-            <a:pPr algn="ctr"/>
-            <a:r>
-              <a:rPr sz="2200" b="0" i="1">
-                <a:solidFill>
-                  <a:srgbClr val="8C8C8C"/>
-                </a:solidFill>
-                <a:latin typeface="Arial"/>
-              </a:rPr>
-              <a:t/>
             </a:r>
           </a:p>
         </p:txBody>
@@ -3955,8 +3605,8 @@
         </p:nvSpPr>
         <p:spPr>
           <a:xfrm>
-            <a:off x="594360" y="2258568"/>
-            <a:ext cx="11002975" cy="685800"/>
+            <a:off x="640080" y="2052828"/>
+            <a:ext cx="10911535" cy="731520"/>
           </a:xfrm>
           <a:prstGeom prst="rect">
             <a:avLst/>
@@ -3971,7 +3621,7 @@
           <a:p>
             <a:pPr algn="ctr"/>
             <a:r>
-              <a:rPr sz="4400" b="1" i="0">
+              <a:rPr sz="4800" b="1" i="0">
                 <a:solidFill>
                   <a:srgbClr val="FFFFFF"/>
                 </a:solidFill>
@@ -3990,8 +3640,8 @@
         </p:nvSpPr>
         <p:spPr>
           <a:xfrm>
-            <a:off x="594360" y="2980944"/>
-            <a:ext cx="11002975" cy="347472"/>
+            <a:off x="640080" y="2985516"/>
+            <a:ext cx="10911535" cy="731520"/>
           </a:xfrm>
           <a:prstGeom prst="rect">
             <a:avLst/>
@@ -4006,83 +3656,13 @@
           <a:p>
             <a:pPr algn="ctr"/>
             <a:r>
-              <a:rPr sz="2200" b="0" i="1">
-                <a:solidFill>
-                  <a:srgbClr val="8C8C8C"/>
-                </a:solidFill>
-                <a:latin typeface="Arial"/>
-              </a:rPr>
-              <a:t/>
-            </a:r>
-          </a:p>
-        </p:txBody>
-      </p:sp>
-      <p:sp>
-        <p:nvSpPr>
-          <p:cNvPr id="4" name="TextBox 3"/>
-          <p:cNvSpPr txBox="1"/>
-          <p:nvPr/>
-        </p:nvSpPr>
-        <p:spPr>
-          <a:xfrm>
-            <a:off x="594360" y="3529584"/>
-            <a:ext cx="11002975" cy="685800"/>
-          </a:xfrm>
-          <a:prstGeom prst="rect">
-            <a:avLst/>
-          </a:prstGeom>
-          <a:noFill/>
-        </p:spPr>
-        <p:txBody>
-          <a:bodyPr wrap="square">
-            <a:spAutoFit/>
-          </a:bodyPr>
-          <a:lstStyle/>
-          <a:p>
-            <a:pPr algn="ctr"/>
-            <a:r>
-              <a:rPr sz="4400" b="1" i="0">
+              <a:rPr sz="4800" b="1" i="0">
                 <a:solidFill>
                   <a:srgbClr val="FFFFFF"/>
                 </a:solidFill>
                 <a:latin typeface="Arial"/>
               </a:rPr>
               <a:t>Ouvi o arauto, os anjos cantam</a:t>
-            </a:r>
-          </a:p>
-        </p:txBody>
-      </p:sp>
-      <p:sp>
-        <p:nvSpPr>
-          <p:cNvPr id="5" name="TextBox 4"/>
-          <p:cNvSpPr txBox="1"/>
-          <p:nvPr/>
-        </p:nvSpPr>
-        <p:spPr>
-          <a:xfrm>
-            <a:off x="594360" y="4251960"/>
-            <a:ext cx="11002975" cy="347472"/>
-          </a:xfrm>
-          <a:prstGeom prst="rect">
-            <a:avLst/>
-          </a:prstGeom>
-          <a:noFill/>
-        </p:spPr>
-        <p:txBody>
-          <a:bodyPr wrap="square">
-            <a:spAutoFit/>
-          </a:bodyPr>
-          <a:lstStyle/>
-          <a:p>
-            <a:pPr algn="ctr"/>
-            <a:r>
-              <a:rPr sz="2200" b="0" i="1">
-                <a:solidFill>
-                  <a:srgbClr val="8C8C8C"/>
-                </a:solidFill>
-                <a:latin typeface="Arial"/>
-              </a:rPr>
-              <a:t/>
             </a:r>
           </a:p>
         </p:txBody>
@@ -4121,8 +3701,8 @@
         </p:nvSpPr>
         <p:spPr>
           <a:xfrm>
-            <a:off x="594360" y="2258568"/>
-            <a:ext cx="11002975" cy="685800"/>
+            <a:off x="640080" y="2052828"/>
+            <a:ext cx="10911535" cy="731520"/>
           </a:xfrm>
           <a:prstGeom prst="rect">
             <a:avLst/>
@@ -4137,7 +3717,7 @@
           <a:p>
             <a:pPr algn="ctr"/>
             <a:r>
-              <a:rPr sz="4400" b="1" i="0">
+              <a:rPr sz="4800" b="1" i="0">
                 <a:solidFill>
                   <a:srgbClr val="FFFFFF"/>
                 </a:solidFill>
@@ -4156,8 +3736,8 @@
         </p:nvSpPr>
         <p:spPr>
           <a:xfrm>
-            <a:off x="594360" y="2980944"/>
-            <a:ext cx="11002975" cy="347472"/>
+            <a:off x="640080" y="2985516"/>
+            <a:ext cx="10911535" cy="731520"/>
           </a:xfrm>
           <a:prstGeom prst="rect">
             <a:avLst/>
@@ -4172,83 +3752,13 @@
           <a:p>
             <a:pPr algn="ctr"/>
             <a:r>
-              <a:rPr sz="2200" b="0" i="1">
-                <a:solidFill>
-                  <a:srgbClr val="8C8C8C"/>
-                </a:solidFill>
-                <a:latin typeface="Arial"/>
-              </a:rPr>
-              <a:t/>
-            </a:r>
-          </a:p>
-        </p:txBody>
-      </p:sp>
-      <p:sp>
-        <p:nvSpPr>
-          <p:cNvPr id="4" name="TextBox 3"/>
-          <p:cNvSpPr txBox="1"/>
-          <p:nvPr/>
-        </p:nvSpPr>
-        <p:spPr>
-          <a:xfrm>
-            <a:off x="594360" y="3529584"/>
-            <a:ext cx="11002975" cy="685800"/>
-          </a:xfrm>
-          <a:prstGeom prst="rect">
-            <a:avLst/>
-          </a:prstGeom>
-          <a:noFill/>
-        </p:spPr>
-        <p:txBody>
-          <a:bodyPr wrap="square">
-            <a:spAutoFit/>
-          </a:bodyPr>
-          <a:lstStyle/>
-          <a:p>
-            <a:pPr algn="ctr"/>
-            <a:r>
-              <a:rPr sz="4400" b="1" i="0">
+              <a:rPr sz="4800" b="1" i="0">
                 <a:solidFill>
                   <a:srgbClr val="FFFFFF"/>
                 </a:solidFill>
                 <a:latin typeface="Arial"/>
               </a:rPr>
               <a:t>Cristo, pela eternidade eterno</a:t>
-            </a:r>
-          </a:p>
-        </p:txBody>
-      </p:sp>
-      <p:sp>
-        <p:nvSpPr>
-          <p:cNvPr id="5" name="TextBox 4"/>
-          <p:cNvSpPr txBox="1"/>
-          <p:nvPr/>
-        </p:nvSpPr>
-        <p:spPr>
-          <a:xfrm>
-            <a:off x="594360" y="4251960"/>
-            <a:ext cx="11002975" cy="347472"/>
-          </a:xfrm>
-          <a:prstGeom prst="rect">
-            <a:avLst/>
-          </a:prstGeom>
-          <a:noFill/>
-        </p:spPr>
-        <p:txBody>
-          <a:bodyPr wrap="square">
-            <a:spAutoFit/>
-          </a:bodyPr>
-          <a:lstStyle/>
-          <a:p>
-            <a:pPr algn="ctr"/>
-            <a:r>
-              <a:rPr sz="2200" b="0" i="1">
-                <a:solidFill>
-                  <a:srgbClr val="8C8C8C"/>
-                </a:solidFill>
-                <a:latin typeface="Arial"/>
-              </a:rPr>
-              <a:t/>
             </a:r>
           </a:p>
         </p:txBody>
@@ -4287,8 +3797,8 @@
         </p:nvSpPr>
         <p:spPr>
           <a:xfrm>
-            <a:off x="594360" y="2258568"/>
-            <a:ext cx="11002975" cy="685800"/>
+            <a:off x="640080" y="2052828"/>
+            <a:ext cx="10911535" cy="731520"/>
           </a:xfrm>
           <a:prstGeom prst="rect">
             <a:avLst/>
@@ -4303,7 +3813,7 @@
           <a:p>
             <a:pPr algn="ctr"/>
             <a:r>
-              <a:rPr sz="4400" b="1" i="0">
+              <a:rPr sz="4800" b="1" i="0">
                 <a:solidFill>
                   <a:srgbClr val="FFFFFF"/>
                 </a:solidFill>
@@ -4322,8 +3832,8 @@
         </p:nvSpPr>
         <p:spPr>
           <a:xfrm>
-            <a:off x="594360" y="2980944"/>
-            <a:ext cx="11002975" cy="347472"/>
+            <a:off x="640080" y="2985516"/>
+            <a:ext cx="10911535" cy="731520"/>
           </a:xfrm>
           <a:prstGeom prst="rect">
             <a:avLst/>
@@ -4338,83 +3848,13 @@
           <a:p>
             <a:pPr algn="ctr"/>
             <a:r>
-              <a:rPr sz="2200" b="0" i="1">
-                <a:solidFill>
-                  <a:srgbClr val="8C8C8C"/>
-                </a:solidFill>
-                <a:latin typeface="Arial"/>
-              </a:rPr>
-              <a:t/>
-            </a:r>
-          </a:p>
-        </p:txBody>
-      </p:sp>
-      <p:sp>
-        <p:nvSpPr>
-          <p:cNvPr id="4" name="TextBox 3"/>
-          <p:cNvSpPr txBox="1"/>
-          <p:nvPr/>
-        </p:nvSpPr>
-        <p:spPr>
-          <a:xfrm>
-            <a:off x="594360" y="3529584"/>
-            <a:ext cx="11002975" cy="685800"/>
-          </a:xfrm>
-          <a:prstGeom prst="rect">
-            <a:avLst/>
-          </a:prstGeom>
-          <a:noFill/>
-        </p:spPr>
-        <p:txBody>
-          <a:bodyPr wrap="square">
-            <a:spAutoFit/>
-          </a:bodyPr>
-          <a:lstStyle/>
-          <a:p>
-            <a:pPr algn="ctr"/>
-            <a:r>
-              <a:rPr sz="4400" b="1" i="0">
+              <a:rPr sz="4800" b="1" i="0">
                 <a:solidFill>
                   <a:srgbClr val="FFFFFF"/>
                 </a:solidFill>
                 <a:latin typeface="Arial"/>
               </a:rPr>
               <a:t>Jesus, nosso Emanuel vela</a:t>
-            </a:r>
-          </a:p>
-        </p:txBody>
-      </p:sp>
-      <p:sp>
-        <p:nvSpPr>
-          <p:cNvPr id="5" name="TextBox 4"/>
-          <p:cNvSpPr txBox="1"/>
-          <p:nvPr/>
-        </p:nvSpPr>
-        <p:spPr>
-          <a:xfrm>
-            <a:off x="594360" y="4251960"/>
-            <a:ext cx="11002975" cy="347472"/>
-          </a:xfrm>
-          <a:prstGeom prst="rect">
-            <a:avLst/>
-          </a:prstGeom>
-          <a:noFill/>
-        </p:spPr>
-        <p:txBody>
-          <a:bodyPr wrap="square">
-            <a:spAutoFit/>
-          </a:bodyPr>
-          <a:lstStyle/>
-          <a:p>
-            <a:pPr algn="ctr"/>
-            <a:r>
-              <a:rPr sz="2200" b="0" i="1">
-                <a:solidFill>
-                  <a:srgbClr val="8C8C8C"/>
-                </a:solidFill>
-                <a:latin typeface="Arial"/>
-              </a:rPr>
-              <a:t/>
             </a:r>
           </a:p>
         </p:txBody>
@@ -4453,8 +3893,8 @@
         </p:nvSpPr>
         <p:spPr>
           <a:xfrm>
-            <a:off x="594360" y="2258568"/>
-            <a:ext cx="11002975" cy="685800"/>
+            <a:off x="640080" y="2052828"/>
+            <a:ext cx="10911535" cy="731520"/>
           </a:xfrm>
           <a:prstGeom prst="rect">
             <a:avLst/>
@@ -4469,7 +3909,7 @@
           <a:p>
             <a:pPr algn="ctr"/>
             <a:r>
-              <a:rPr sz="4400" b="1" i="0">
+              <a:rPr sz="4800" b="1" i="0">
                 <a:solidFill>
                   <a:srgbClr val="FFFFFF"/>
                 </a:solidFill>
@@ -4488,8 +3928,8 @@
         </p:nvSpPr>
         <p:spPr>
           <a:xfrm>
-            <a:off x="594360" y="2980944"/>
-            <a:ext cx="11002975" cy="347472"/>
+            <a:off x="640080" y="2985516"/>
+            <a:ext cx="10911535" cy="731520"/>
           </a:xfrm>
           <a:prstGeom prst="rect">
             <a:avLst/>
@@ -4504,83 +3944,13 @@
           <a:p>
             <a:pPr algn="ctr"/>
             <a:r>
-              <a:rPr sz="2200" b="0" i="1">
-                <a:solidFill>
-                  <a:srgbClr val="8C8C8C"/>
-                </a:solidFill>
-                <a:latin typeface="Arial"/>
-              </a:rPr>
-              <a:t/>
-            </a:r>
-          </a:p>
-        </p:txBody>
-      </p:sp>
-      <p:sp>
-        <p:nvSpPr>
-          <p:cNvPr id="4" name="TextBox 3"/>
-          <p:cNvSpPr txBox="1"/>
-          <p:nvPr/>
-        </p:nvSpPr>
-        <p:spPr>
-          <a:xfrm>
-            <a:off x="594360" y="3529584"/>
-            <a:ext cx="11002975" cy="685800"/>
-          </a:xfrm>
-          <a:prstGeom prst="rect">
-            <a:avLst/>
-          </a:prstGeom>
-          <a:noFill/>
-        </p:spPr>
-        <p:txBody>
-          <a:bodyPr wrap="square">
-            <a:spAutoFit/>
-          </a:bodyPr>
-          <a:lstStyle/>
-          <a:p>
-            <a:pPr algn="ctr"/>
-            <a:r>
-              <a:rPr sz="4400" b="1" i="0">
+              <a:rPr sz="4800" b="1" i="0">
                 <a:solidFill>
                   <a:srgbClr val="FFFFFF"/>
                 </a:solidFill>
                 <a:latin typeface="Arial"/>
               </a:rPr>
               <a:t>Brandamente no silêncio chega</a:t>
-            </a:r>
-          </a:p>
-        </p:txBody>
-      </p:sp>
-      <p:sp>
-        <p:nvSpPr>
-          <p:cNvPr id="5" name="TextBox 4"/>
-          <p:cNvSpPr txBox="1"/>
-          <p:nvPr/>
-        </p:nvSpPr>
-        <p:spPr>
-          <a:xfrm>
-            <a:off x="594360" y="4251960"/>
-            <a:ext cx="11002975" cy="347472"/>
-          </a:xfrm>
-          <a:prstGeom prst="rect">
-            <a:avLst/>
-          </a:prstGeom>
-          <a:noFill/>
-        </p:spPr>
-        <p:txBody>
-          <a:bodyPr wrap="square">
-            <a:spAutoFit/>
-          </a:bodyPr>
-          <a:lstStyle/>
-          <a:p>
-            <a:pPr algn="ctr"/>
-            <a:r>
-              <a:rPr sz="2200" b="0" i="1">
-                <a:solidFill>
-                  <a:srgbClr val="8C8C8C"/>
-                </a:solidFill>
-                <a:latin typeface="Arial"/>
-              </a:rPr>
-              <a:t/>
             </a:r>
           </a:p>
         </p:txBody>
@@ -4619,8 +3989,8 @@
         </p:nvSpPr>
         <p:spPr>
           <a:xfrm>
-            <a:off x="594360" y="2258568"/>
-            <a:ext cx="11002975" cy="685800"/>
+            <a:off x="640080" y="2052828"/>
+            <a:ext cx="10911535" cy="731520"/>
           </a:xfrm>
           <a:prstGeom prst="rect">
             <a:avLst/>
@@ -4635,7 +4005,7 @@
           <a:p>
             <a:pPr algn="ctr"/>
             <a:r>
-              <a:rPr sz="4400" b="1" i="0">
+              <a:rPr sz="4800" b="1" i="0">
                 <a:solidFill>
                   <a:srgbClr val="FFFFFF"/>
                 </a:solidFill>
@@ -4654,8 +4024,8 @@
         </p:nvSpPr>
         <p:spPr>
           <a:xfrm>
-            <a:off x="594360" y="2980944"/>
-            <a:ext cx="11002975" cy="347472"/>
+            <a:off x="640080" y="2985516"/>
+            <a:ext cx="10911535" cy="731520"/>
           </a:xfrm>
           <a:prstGeom prst="rect">
             <a:avLst/>
@@ -4670,83 +4040,13 @@
           <a:p>
             <a:pPr algn="ctr"/>
             <a:r>
-              <a:rPr sz="2200" b="0" i="1">
-                <a:solidFill>
-                  <a:srgbClr val="8C8C8C"/>
-                </a:solidFill>
-                <a:latin typeface="Arial"/>
-              </a:rPr>
-              <a:t/>
-            </a:r>
-          </a:p>
-        </p:txBody>
-      </p:sp>
-      <p:sp>
-        <p:nvSpPr>
-          <p:cNvPr id="4" name="TextBox 3"/>
-          <p:cNvSpPr txBox="1"/>
-          <p:nvPr/>
-        </p:nvSpPr>
-        <p:spPr>
-          <a:xfrm>
-            <a:off x="594360" y="3529584"/>
-            <a:ext cx="11002975" cy="685800"/>
-          </a:xfrm>
-          <a:prstGeom prst="rect">
-            <a:avLst/>
-          </a:prstGeom>
-          <a:noFill/>
-        </p:spPr>
-        <p:txBody>
-          <a:bodyPr wrap="square">
-            <a:spAutoFit/>
-          </a:bodyPr>
-          <a:lstStyle/>
-          <a:p>
-            <a:pPr algn="ctr"/>
-            <a:r>
-              <a:rPr sz="4400" b="1" i="0">
+              <a:rPr sz="4800" b="1" i="0">
                 <a:solidFill>
                   <a:srgbClr val="FFFFFF"/>
                 </a:solidFill>
                 <a:latin typeface="Arial"/>
               </a:rPr>
               <a:t>Ressurge com cura nas asas</a:t>
-            </a:r>
-          </a:p>
-        </p:txBody>
-      </p:sp>
-      <p:sp>
-        <p:nvSpPr>
-          <p:cNvPr id="5" name="TextBox 4"/>
-          <p:cNvSpPr txBox="1"/>
-          <p:nvPr/>
-        </p:nvSpPr>
-        <p:spPr>
-          <a:xfrm>
-            <a:off x="594360" y="4251960"/>
-            <a:ext cx="11002975" cy="347472"/>
-          </a:xfrm>
-          <a:prstGeom prst="rect">
-            <a:avLst/>
-          </a:prstGeom>
-          <a:noFill/>
-        </p:spPr>
-        <p:txBody>
-          <a:bodyPr wrap="square">
-            <a:spAutoFit/>
-          </a:bodyPr>
-          <a:lstStyle/>
-          <a:p>
-            <a:pPr algn="ctr"/>
-            <a:r>
-              <a:rPr sz="2200" b="0" i="1">
-                <a:solidFill>
-                  <a:srgbClr val="8C8C8C"/>
-                </a:solidFill>
-                <a:latin typeface="Arial"/>
-              </a:rPr>
-              <a:t/>
             </a:r>
           </a:p>
         </p:txBody>
@@ -4785,8 +4085,8 @@
         </p:nvSpPr>
         <p:spPr>
           <a:xfrm>
-            <a:off x="594360" y="2258568"/>
-            <a:ext cx="11002975" cy="685800"/>
+            <a:off x="640080" y="2052828"/>
+            <a:ext cx="10911535" cy="731520"/>
           </a:xfrm>
           <a:prstGeom prst="rect">
             <a:avLst/>
@@ -4801,7 +4101,7 @@
           <a:p>
             <a:pPr algn="ctr"/>
             <a:r>
-              <a:rPr sz="4400" b="1" i="0">
+              <a:rPr sz="4800" b="1" i="0">
                 <a:solidFill>
                   <a:srgbClr val="FFFFFF"/>
                 </a:solidFill>
@@ -4820,8 +4120,8 @@
         </p:nvSpPr>
         <p:spPr>
           <a:xfrm>
-            <a:off x="594360" y="2980944"/>
-            <a:ext cx="11002975" cy="347472"/>
+            <a:off x="640080" y="2985516"/>
+            <a:ext cx="10911535" cy="731520"/>
           </a:xfrm>
           <a:prstGeom prst="rect">
             <a:avLst/>
@@ -4836,83 +4136,13 @@
           <a:p>
             <a:pPr algn="ctr"/>
             <a:r>
-              <a:rPr sz="2200" b="0" i="1">
-                <a:solidFill>
-                  <a:srgbClr val="8C8C8C"/>
-                </a:solidFill>
-                <a:latin typeface="Arial"/>
-              </a:rPr>
-              <a:t/>
-            </a:r>
-          </a:p>
-        </p:txBody>
-      </p:sp>
-      <p:sp>
-        <p:nvSpPr>
-          <p:cNvPr id="4" name="TextBox 3"/>
-          <p:cNvSpPr txBox="1"/>
-          <p:nvPr/>
-        </p:nvSpPr>
-        <p:spPr>
-          <a:xfrm>
-            <a:off x="594360" y="3529584"/>
-            <a:ext cx="11002975" cy="685800"/>
-          </a:xfrm>
-          <a:prstGeom prst="rect">
-            <a:avLst/>
-          </a:prstGeom>
-          <a:noFill/>
-        </p:spPr>
-        <p:txBody>
-          <a:bodyPr wrap="square">
-            <a:spAutoFit/>
-          </a:bodyPr>
-          <a:lstStyle/>
-          <a:p>
-            <a:pPr algn="ctr"/>
-            <a:r>
-              <a:rPr sz="4400" b="1" i="0">
+              <a:rPr sz="4800" b="1" i="0">
                 <a:solidFill>
                   <a:srgbClr val="FFFFFF"/>
                 </a:solidFill>
                 <a:latin typeface="Arial"/>
               </a:rPr>
               <a:t>Ouvi o arauto, os anjos cantam</a:t>
-            </a:r>
-          </a:p>
-        </p:txBody>
-      </p:sp>
-      <p:sp>
-        <p:nvSpPr>
-          <p:cNvPr id="5" name="TextBox 4"/>
-          <p:cNvSpPr txBox="1"/>
-          <p:nvPr/>
-        </p:nvSpPr>
-        <p:spPr>
-          <a:xfrm>
-            <a:off x="594360" y="4251960"/>
-            <a:ext cx="11002975" cy="347472"/>
-          </a:xfrm>
-          <a:prstGeom prst="rect">
-            <a:avLst/>
-          </a:prstGeom>
-          <a:noFill/>
-        </p:spPr>
-        <p:txBody>
-          <a:bodyPr wrap="square">
-            <a:spAutoFit/>
-          </a:bodyPr>
-          <a:lstStyle/>
-          <a:p>
-            <a:pPr algn="ctr"/>
-            <a:r>
-              <a:rPr sz="2200" b="0" i="1">
-                <a:solidFill>
-                  <a:srgbClr val="8C8C8C"/>
-                </a:solidFill>
-                <a:latin typeface="Arial"/>
-              </a:rPr>
-              <a:t/>
             </a:r>
           </a:p>
         </p:txBody>
@@ -4951,8 +4181,8 @@
         </p:nvSpPr>
         <p:spPr>
           <a:xfrm>
-            <a:off x="594360" y="2258568"/>
-            <a:ext cx="11002975" cy="685800"/>
+            <a:off x="640080" y="2052828"/>
+            <a:ext cx="10911535" cy="731520"/>
           </a:xfrm>
           <a:prstGeom prst="rect">
             <a:avLst/>
@@ -4967,7 +4197,7 @@
           <a:p>
             <a:pPr algn="ctr"/>
             <a:r>
-              <a:rPr sz="4400" b="1" i="0">
+              <a:rPr sz="4800" b="1" i="0">
                 <a:solidFill>
                   <a:srgbClr val="FFFFFF"/>
                 </a:solidFill>
@@ -4986,8 +4216,8 @@
         </p:nvSpPr>
         <p:spPr>
           <a:xfrm>
-            <a:off x="594360" y="2980944"/>
-            <a:ext cx="11002975" cy="347472"/>
+            <a:off x="640080" y="2985516"/>
+            <a:ext cx="10911535" cy="731520"/>
           </a:xfrm>
           <a:prstGeom prst="rect">
             <a:avLst/>
@@ -5002,83 +4232,13 @@
           <a:p>
             <a:pPr algn="ctr"/>
             <a:r>
-              <a:rPr sz="2200" b="0" i="1">
-                <a:solidFill>
-                  <a:srgbClr val="8C8C8C"/>
-                </a:solidFill>
-                <a:latin typeface="Arial"/>
-              </a:rPr>
-              <a:t/>
-            </a:r>
-          </a:p>
-        </p:txBody>
-      </p:sp>
-      <p:sp>
-        <p:nvSpPr>
-          <p:cNvPr id="4" name="TextBox 3"/>
-          <p:cNvSpPr txBox="1"/>
-          <p:nvPr/>
-        </p:nvSpPr>
-        <p:spPr>
-          <a:xfrm>
-            <a:off x="594360" y="3529584"/>
-            <a:ext cx="11002975" cy="685800"/>
-          </a:xfrm>
-          <a:prstGeom prst="rect">
-            <a:avLst/>
-          </a:prstGeom>
-          <a:noFill/>
-        </p:spPr>
-        <p:txBody>
-          <a:bodyPr wrap="square">
-            <a:spAutoFit/>
-          </a:bodyPr>
-          <a:lstStyle/>
-          <a:p>
-            <a:pPr algn="ctr"/>
-            <a:r>
-              <a:rPr sz="4400" b="1" i="0">
+              <a:rPr sz="4800" b="1" i="0">
                 <a:solidFill>
                   <a:srgbClr val="FFFFFF"/>
                 </a:solidFill>
                 <a:latin typeface="Arial"/>
               </a:rPr>
               <a:t>Alegrai-vos, todas as nações</a:t>
-            </a:r>
-          </a:p>
-        </p:txBody>
-      </p:sp>
-      <p:sp>
-        <p:nvSpPr>
-          <p:cNvPr id="5" name="TextBox 4"/>
-          <p:cNvSpPr txBox="1"/>
-          <p:nvPr/>
-        </p:nvSpPr>
-        <p:spPr>
-          <a:xfrm>
-            <a:off x="594360" y="4251960"/>
-            <a:ext cx="11002975" cy="347472"/>
-          </a:xfrm>
-          <a:prstGeom prst="rect">
-            <a:avLst/>
-          </a:prstGeom>
-          <a:noFill/>
-        </p:spPr>
-        <p:txBody>
-          <a:bodyPr wrap="square">
-            <a:spAutoFit/>
-          </a:bodyPr>
-          <a:lstStyle/>
-          <a:p>
-            <a:pPr algn="ctr"/>
-            <a:r>
-              <a:rPr sz="2200" b="0" i="1">
-                <a:solidFill>
-                  <a:srgbClr val="8C8C8C"/>
-                </a:solidFill>
-                <a:latin typeface="Arial"/>
-              </a:rPr>
-              <a:t/>
             </a:r>
           </a:p>
         </p:txBody>
@@ -5117,8 +4277,8 @@
         </p:nvSpPr>
         <p:spPr>
           <a:xfrm>
-            <a:off x="594360" y="2258568"/>
-            <a:ext cx="11002975" cy="685800"/>
+            <a:off x="640080" y="2052828"/>
+            <a:ext cx="10911535" cy="731520"/>
           </a:xfrm>
           <a:prstGeom prst="rect">
             <a:avLst/>
@@ -5133,7 +4293,7 @@
           <a:p>
             <a:pPr algn="ctr"/>
             <a:r>
-              <a:rPr sz="4400" b="1" i="0">
+              <a:rPr sz="4800" b="1" i="0">
                 <a:solidFill>
                   <a:srgbClr val="FFFFFF"/>
                 </a:solidFill>
@@ -5152,8 +4312,8 @@
         </p:nvSpPr>
         <p:spPr>
           <a:xfrm>
-            <a:off x="594360" y="2980944"/>
-            <a:ext cx="11002975" cy="347472"/>
+            <a:off x="640080" y="2985516"/>
+            <a:ext cx="10911535" cy="731520"/>
           </a:xfrm>
           <a:prstGeom prst="rect">
             <a:avLst/>
@@ -5168,83 +4328,13 @@
           <a:p>
             <a:pPr algn="ctr"/>
             <a:r>
-              <a:rPr sz="2200" b="0" i="1">
-                <a:solidFill>
-                  <a:srgbClr val="8C8C8C"/>
-                </a:solidFill>
-                <a:latin typeface="Arial"/>
-              </a:rPr>
-              <a:t/>
-            </a:r>
-          </a:p>
-        </p:txBody>
-      </p:sp>
-      <p:sp>
-        <p:nvSpPr>
-          <p:cNvPr id="4" name="TextBox 3"/>
-          <p:cNvSpPr txBox="1"/>
-          <p:nvPr/>
-        </p:nvSpPr>
-        <p:spPr>
-          <a:xfrm>
-            <a:off x="594360" y="3529584"/>
-            <a:ext cx="11002975" cy="685800"/>
-          </a:xfrm>
-          <a:prstGeom prst="rect">
-            <a:avLst/>
-          </a:prstGeom>
-          <a:noFill/>
-        </p:spPr>
-        <p:txBody>
-          <a:bodyPr wrap="square">
-            <a:spAutoFit/>
-          </a:bodyPr>
-          <a:lstStyle/>
-          <a:p>
-            <a:pPr algn="ctr"/>
-            <a:r>
-              <a:rPr sz="4400" b="1" i="0">
+              <a:rPr sz="4800" b="1" i="0">
                 <a:solidFill>
                   <a:srgbClr val="FFFFFF"/>
                 </a:solidFill>
                 <a:latin typeface="Arial"/>
               </a:rPr>
               <a:t>Alegrai-vos, todas as nações</a:t>
-            </a:r>
-          </a:p>
-        </p:txBody>
-      </p:sp>
-      <p:sp>
-        <p:nvSpPr>
-          <p:cNvPr id="5" name="TextBox 4"/>
-          <p:cNvSpPr txBox="1"/>
-          <p:nvPr/>
-        </p:nvSpPr>
-        <p:spPr>
-          <a:xfrm>
-            <a:off x="594360" y="4251960"/>
-            <a:ext cx="11002975" cy="347472"/>
-          </a:xfrm>
-          <a:prstGeom prst="rect">
-            <a:avLst/>
-          </a:prstGeom>
-          <a:noFill/>
-        </p:spPr>
-        <p:txBody>
-          <a:bodyPr wrap="square">
-            <a:spAutoFit/>
-          </a:bodyPr>
-          <a:lstStyle/>
-          <a:p>
-            <a:pPr algn="ctr"/>
-            <a:r>
-              <a:rPr sz="2200" b="0" i="1">
-                <a:solidFill>
-                  <a:srgbClr val="8C8C8C"/>
-                </a:solidFill>
-                <a:latin typeface="Arial"/>
-              </a:rPr>
-              <a:t/>
             </a:r>
           </a:p>
         </p:txBody>
@@ -5283,8 +4373,8 @@
         </p:nvSpPr>
         <p:spPr>
           <a:xfrm>
-            <a:off x="594360" y="1837944"/>
-            <a:ext cx="11002975" cy="685800"/>
+            <a:off x="640080" y="1650492"/>
+            <a:ext cx="10911535" cy="731520"/>
           </a:xfrm>
           <a:prstGeom prst="rect">
             <a:avLst/>
@@ -5299,7 +4389,7 @@
           <a:p>
             <a:pPr algn="ctr"/>
             <a:r>
-              <a:rPr sz="4400" b="1" i="0">
+              <a:rPr sz="4800" b="1" i="0">
                 <a:solidFill>
                   <a:srgbClr val="FFFFFF"/>
                 </a:solidFill>
@@ -5318,8 +4408,8 @@
         </p:nvSpPr>
         <p:spPr>
           <a:xfrm>
-            <a:off x="594360" y="2560320"/>
-            <a:ext cx="11002975" cy="384048"/>
+            <a:off x="640080" y="2418588"/>
+            <a:ext cx="10911535" cy="365760"/>
           </a:xfrm>
           <a:prstGeom prst="rect">
             <a:avLst/>
@@ -5336,7 +4426,7 @@
             <a:r>
               <a:rPr sz="2400" b="0" i="1">
                 <a:solidFill>
-                  <a:srgbClr val="B4B4B4"/>
+                  <a:srgbClr val="AAAAAA"/>
                 </a:solidFill>
                 <a:latin typeface="Arial"/>
               </a:rPr>
@@ -5353,8 +4443,8 @@
         </p:nvSpPr>
         <p:spPr>
           <a:xfrm>
-            <a:off x="594360" y="2980944"/>
-            <a:ext cx="11002975" cy="347472"/>
+            <a:off x="640080" y="2985516"/>
+            <a:ext cx="10911535" cy="731520"/>
           </a:xfrm>
           <a:prstGeom prst="rect">
             <a:avLst/>
@@ -5369,13 +4459,13 @@
           <a:p>
             <a:pPr algn="ctr"/>
             <a:r>
-              <a:rPr sz="2000" b="0" i="1">
-                <a:solidFill>
-                  <a:srgbClr val="8C8C8C"/>
+              <a:rPr sz="4800" b="1" i="0">
+                <a:solidFill>
+                  <a:srgbClr val="FFFFFF"/>
                 </a:solidFill>
                 <a:latin typeface="Arial"/>
               </a:rPr>
-              <a:t/>
+              <a:t>今ぞうまれし..</a:t>
             </a:r>
           </a:p>
         </p:txBody>
@@ -5388,8 +4478,8 @@
         </p:nvSpPr>
         <p:spPr>
           <a:xfrm>
-            <a:off x="594360" y="3529584"/>
-            <a:ext cx="11002975" cy="685800"/>
+            <a:off x="640080" y="3753612"/>
+            <a:ext cx="10911535" cy="365760"/>
           </a:xfrm>
           <a:prstGeom prst="rect">
             <a:avLst/>
@@ -5404,83 +4494,13 @@
           <a:p>
             <a:pPr algn="ctr"/>
             <a:r>
-              <a:rPr sz="4400" b="1" i="0">
-                <a:solidFill>
-                  <a:srgbClr val="FFFFFF"/>
-                </a:solidFill>
-                <a:latin typeface="Arial"/>
-              </a:rPr>
-              <a:t>今ぞうまれし..</a:t>
-            </a:r>
-          </a:p>
-        </p:txBody>
-      </p:sp>
-      <p:sp>
-        <p:nvSpPr>
-          <p:cNvPr id="6" name="TextBox 5"/>
-          <p:cNvSpPr txBox="1"/>
-          <p:nvPr/>
-        </p:nvSpPr>
-        <p:spPr>
-          <a:xfrm>
-            <a:off x="594360" y="4251960"/>
-            <a:ext cx="11002975" cy="384048"/>
-          </a:xfrm>
-          <a:prstGeom prst="rect">
-            <a:avLst/>
-          </a:prstGeom>
-          <a:noFill/>
-        </p:spPr>
-        <p:txBody>
-          <a:bodyPr wrap="square">
-            <a:spAutoFit/>
-          </a:bodyPr>
-          <a:lstStyle/>
-          <a:p>
-            <a:pPr algn="ctr"/>
-            <a:r>
               <a:rPr sz="2400" b="0" i="1">
                 <a:solidFill>
-                  <a:srgbClr val="B4B4B4"/>
+                  <a:srgbClr val="AAAAAA"/>
                 </a:solidFill>
                 <a:latin typeface="Arial"/>
               </a:rPr>
               <a:t>imazo.umareshi..</a:t>
-            </a:r>
-          </a:p>
-        </p:txBody>
-      </p:sp>
-      <p:sp>
-        <p:nvSpPr>
-          <p:cNvPr id="7" name="TextBox 6"/>
-          <p:cNvSpPr txBox="1"/>
-          <p:nvPr/>
-        </p:nvSpPr>
-        <p:spPr>
-          <a:xfrm>
-            <a:off x="594360" y="4672584"/>
-            <a:ext cx="11002975" cy="347472"/>
-          </a:xfrm>
-          <a:prstGeom prst="rect">
-            <a:avLst/>
-          </a:prstGeom>
-          <a:noFill/>
-        </p:spPr>
-        <p:txBody>
-          <a:bodyPr wrap="square">
-            <a:spAutoFit/>
-          </a:bodyPr>
-          <a:lstStyle/>
-          <a:p>
-            <a:pPr algn="ctr"/>
-            <a:r>
-              <a:rPr sz="2000" b="0" i="1">
-                <a:solidFill>
-                  <a:srgbClr val="8C8C8C"/>
-                </a:solidFill>
-                <a:latin typeface="Arial"/>
-              </a:rPr>
-              <a:t/>
             </a:r>
           </a:p>
         </p:txBody>
@@ -5519,8 +4539,8 @@
         </p:nvSpPr>
         <p:spPr>
           <a:xfrm>
-            <a:off x="594360" y="2683764"/>
-            <a:ext cx="11002975" cy="685800"/>
+            <a:off x="640080" y="2500884"/>
+            <a:ext cx="10911535" cy="731520"/>
           </a:xfrm>
           <a:prstGeom prst="rect">
             <a:avLst/>
@@ -5535,7 +4555,7 @@
           <a:p>
             <a:pPr algn="ctr"/>
             <a:r>
-              <a:rPr sz="4400" b="1" i="0">
+              <a:rPr sz="4800" b="1" i="0">
                 <a:solidFill>
                   <a:srgbClr val="FFFFFF"/>
                 </a:solidFill>
@@ -5554,8 +4574,8 @@
         </p:nvSpPr>
         <p:spPr>
           <a:xfrm>
-            <a:off x="594360" y="3406140"/>
-            <a:ext cx="11002975" cy="384048"/>
+            <a:off x="640080" y="3268980"/>
+            <a:ext cx="10911535" cy="365760"/>
           </a:xfrm>
           <a:prstGeom prst="rect">
             <a:avLst/>
@@ -5572,46 +4592,11 @@
             <a:r>
               <a:rPr sz="2400" b="0" i="1">
                 <a:solidFill>
-                  <a:srgbClr val="B4B4B4"/>
+                  <a:srgbClr val="AAAAAA"/>
                 </a:solidFill>
                 <a:latin typeface="Arial"/>
               </a:rPr>
               <a:t>kimi wo tataeyo</a:t>
-            </a:r>
-          </a:p>
-        </p:txBody>
-      </p:sp>
-      <p:sp>
-        <p:nvSpPr>
-          <p:cNvPr id="4" name="TextBox 3"/>
-          <p:cNvSpPr txBox="1"/>
-          <p:nvPr/>
-        </p:nvSpPr>
-        <p:spPr>
-          <a:xfrm>
-            <a:off x="594360" y="3826764"/>
-            <a:ext cx="11002975" cy="347472"/>
-          </a:xfrm>
-          <a:prstGeom prst="rect">
-            <a:avLst/>
-          </a:prstGeom>
-          <a:noFill/>
-        </p:spPr>
-        <p:txBody>
-          <a:bodyPr wrap="square">
-            <a:spAutoFit/>
-          </a:bodyPr>
-          <a:lstStyle/>
-          <a:p>
-            <a:pPr algn="ctr"/>
-            <a:r>
-              <a:rPr sz="2000" b="0" i="1">
-                <a:solidFill>
-                  <a:srgbClr val="8C8C8C"/>
-                </a:solidFill>
-                <a:latin typeface="Arial"/>
-              </a:rPr>
-              <a:t/>
             </a:r>
           </a:p>
         </p:txBody>
@@ -5650,8 +4635,8 @@
         </p:nvSpPr>
         <p:spPr>
           <a:xfrm>
-            <a:off x="594360" y="2258568"/>
-            <a:ext cx="11002975" cy="685800"/>
+            <a:off x="640080" y="2052828"/>
+            <a:ext cx="10911535" cy="731520"/>
           </a:xfrm>
           <a:prstGeom prst="rect">
             <a:avLst/>
@@ -5666,7 +4651,7 @@
           <a:p>
             <a:pPr algn="ctr"/>
             <a:r>
-              <a:rPr sz="4400" b="1" i="0">
+              <a:rPr sz="4800" b="1" i="0">
                 <a:solidFill>
                   <a:srgbClr val="FFFFFF"/>
                 </a:solidFill>
@@ -5685,8 +4670,8 @@
         </p:nvSpPr>
         <p:spPr>
           <a:xfrm>
-            <a:off x="594360" y="2980944"/>
-            <a:ext cx="11002975" cy="347472"/>
+            <a:off x="640080" y="2985516"/>
+            <a:ext cx="10911535" cy="731520"/>
           </a:xfrm>
           <a:prstGeom prst="rect">
             <a:avLst/>
@@ -5701,83 +4686,13 @@
           <a:p>
             <a:pPr algn="ctr"/>
             <a:r>
-              <a:rPr sz="2200" b="0" i="1">
-                <a:solidFill>
-                  <a:srgbClr val="8C8C8C"/>
-                </a:solidFill>
-                <a:latin typeface="Arial"/>
-              </a:rPr>
-              <a:t/>
-            </a:r>
-          </a:p>
-        </p:txBody>
-      </p:sp>
-      <p:sp>
-        <p:nvSpPr>
-          <p:cNvPr id="4" name="TextBox 3"/>
-          <p:cNvSpPr txBox="1"/>
-          <p:nvPr/>
-        </p:nvSpPr>
-        <p:spPr>
-          <a:xfrm>
-            <a:off x="594360" y="3529584"/>
-            <a:ext cx="11002975" cy="685800"/>
-          </a:xfrm>
-          <a:prstGeom prst="rect">
-            <a:avLst/>
-          </a:prstGeom>
-          <a:noFill/>
-        </p:spPr>
-        <p:txBody>
-          <a:bodyPr wrap="square">
-            <a:spAutoFit/>
-          </a:bodyPr>
-          <a:lstStyle/>
-          <a:p>
-            <a:pPr algn="ctr"/>
-            <a:r>
-              <a:rPr sz="4141" b="1" i="0">
+              <a:rPr sz="4500" b="1" i="0">
                 <a:solidFill>
                   <a:srgbClr val="FFFFFF"/>
                 </a:solidFill>
                 <a:latin typeface="Arial"/>
               </a:rPr>
               <a:t>Com as hostes angelicais proclamai</a:t>
-            </a:r>
-          </a:p>
-        </p:txBody>
-      </p:sp>
-      <p:sp>
-        <p:nvSpPr>
-          <p:cNvPr id="5" name="TextBox 4"/>
-          <p:cNvSpPr txBox="1"/>
-          <p:nvPr/>
-        </p:nvSpPr>
-        <p:spPr>
-          <a:xfrm>
-            <a:off x="594360" y="4251960"/>
-            <a:ext cx="11002975" cy="347472"/>
-          </a:xfrm>
-          <a:prstGeom prst="rect">
-            <a:avLst/>
-          </a:prstGeom>
-          <a:noFill/>
-        </p:spPr>
-        <p:txBody>
-          <a:bodyPr wrap="square">
-            <a:spAutoFit/>
-          </a:bodyPr>
-          <a:lstStyle/>
-          <a:p>
-            <a:pPr algn="ctr"/>
-            <a:r>
-              <a:rPr sz="2200" b="0" i="1">
-                <a:solidFill>
-                  <a:srgbClr val="8C8C8C"/>
-                </a:solidFill>
-                <a:latin typeface="Arial"/>
-              </a:rPr>
-              <a:t/>
             </a:r>
           </a:p>
         </p:txBody>
@@ -5816,8 +4731,8 @@
         </p:nvSpPr>
         <p:spPr>
           <a:xfrm>
-            <a:off x="594360" y="2258568"/>
-            <a:ext cx="11002975" cy="685800"/>
+            <a:off x="640080" y="2052828"/>
+            <a:ext cx="10911535" cy="731520"/>
           </a:xfrm>
           <a:prstGeom prst="rect">
             <a:avLst/>
@@ -5832,7 +4747,7 @@
           <a:p>
             <a:pPr algn="ctr"/>
             <a:r>
-              <a:rPr sz="4400" b="1" i="0">
+              <a:rPr sz="4800" b="1" i="0">
                 <a:solidFill>
                   <a:srgbClr val="FFFFFF"/>
                 </a:solidFill>
@@ -5851,8 +4766,8 @@
         </p:nvSpPr>
         <p:spPr>
           <a:xfrm>
-            <a:off x="594360" y="2980944"/>
-            <a:ext cx="11002975" cy="347472"/>
+            <a:off x="640080" y="2985516"/>
+            <a:ext cx="10911535" cy="731520"/>
           </a:xfrm>
           <a:prstGeom prst="rect">
             <a:avLst/>
@@ -5867,83 +4782,13 @@
           <a:p>
             <a:pPr algn="ctr"/>
             <a:r>
-              <a:rPr sz="2200" b="0" i="1">
-                <a:solidFill>
-                  <a:srgbClr val="8C8C8C"/>
-                </a:solidFill>
-                <a:latin typeface="Arial"/>
-              </a:rPr>
-              <a:t/>
-            </a:r>
-          </a:p>
-        </p:txBody>
-      </p:sp>
-      <p:sp>
-        <p:nvSpPr>
-          <p:cNvPr id="4" name="TextBox 3"/>
-          <p:cNvSpPr txBox="1"/>
-          <p:nvPr/>
-        </p:nvSpPr>
-        <p:spPr>
-          <a:xfrm>
-            <a:off x="594360" y="3529584"/>
-            <a:ext cx="11002975" cy="685800"/>
-          </a:xfrm>
-          <a:prstGeom prst="rect">
-            <a:avLst/>
-          </a:prstGeom>
-          <a:noFill/>
-        </p:spPr>
-        <p:txBody>
-          <a:bodyPr wrap="square">
-            <a:spAutoFit/>
-          </a:bodyPr>
-          <a:lstStyle/>
-          <a:p>
-            <a:pPr algn="ctr"/>
-            <a:r>
-              <a:rPr sz="4400" b="1" i="0">
+              <a:rPr sz="4800" b="1" i="0">
                 <a:solidFill>
                   <a:srgbClr val="FFFFFF"/>
                 </a:solidFill>
                 <a:latin typeface="Arial"/>
               </a:rPr>
               <a:t>Ouvi o arauto, os anjos cantam</a:t>
-            </a:r>
-          </a:p>
-        </p:txBody>
-      </p:sp>
-      <p:sp>
-        <p:nvSpPr>
-          <p:cNvPr id="5" name="TextBox 4"/>
-          <p:cNvSpPr txBox="1"/>
-          <p:nvPr/>
-        </p:nvSpPr>
-        <p:spPr>
-          <a:xfrm>
-            <a:off x="594360" y="4251960"/>
-            <a:ext cx="11002975" cy="347472"/>
-          </a:xfrm>
-          <a:prstGeom prst="rect">
-            <a:avLst/>
-          </a:prstGeom>
-          <a:noFill/>
-        </p:spPr>
-        <p:txBody>
-          <a:bodyPr wrap="square">
-            <a:spAutoFit/>
-          </a:bodyPr>
-          <a:lstStyle/>
-          <a:p>
-            <a:pPr algn="ctr"/>
-            <a:r>
-              <a:rPr sz="2200" b="0" i="1">
-                <a:solidFill>
-                  <a:srgbClr val="8C8C8C"/>
-                </a:solidFill>
-                <a:latin typeface="Arial"/>
-              </a:rPr>
-              <a:t/>
             </a:r>
           </a:p>
         </p:txBody>
@@ -5982,8 +4827,8 @@
         </p:nvSpPr>
         <p:spPr>
           <a:xfrm>
-            <a:off x="594360" y="2258568"/>
-            <a:ext cx="11002975" cy="685800"/>
+            <a:off x="640080" y="2052828"/>
+            <a:ext cx="10911535" cy="731520"/>
           </a:xfrm>
           <a:prstGeom prst="rect">
             <a:avLst/>
@@ -5998,7 +4843,7 @@
           <a:p>
             <a:pPr algn="ctr"/>
             <a:r>
-              <a:rPr sz="4400" b="1" i="0">
+              <a:rPr sz="4800" b="1" i="0">
                 <a:solidFill>
                   <a:srgbClr val="FFFFFF"/>
                 </a:solidFill>
@@ -6017,8 +4862,8 @@
         </p:nvSpPr>
         <p:spPr>
           <a:xfrm>
-            <a:off x="594360" y="2980944"/>
-            <a:ext cx="11002975" cy="347472"/>
+            <a:off x="640080" y="2985516"/>
+            <a:ext cx="10911535" cy="731520"/>
           </a:xfrm>
           <a:prstGeom prst="rect">
             <a:avLst/>
@@ -6033,83 +4878,13 @@
           <a:p>
             <a:pPr algn="ctr"/>
             <a:r>
-              <a:rPr sz="2200" b="0" i="1">
-                <a:solidFill>
-                  <a:srgbClr val="8C8C8C"/>
-                </a:solidFill>
-                <a:latin typeface="Arial"/>
-              </a:rPr>
-              <a:t/>
-            </a:r>
-          </a:p>
-        </p:txBody>
-      </p:sp>
-      <p:sp>
-        <p:nvSpPr>
-          <p:cNvPr id="4" name="TextBox 3"/>
-          <p:cNvSpPr txBox="1"/>
-          <p:nvPr/>
-        </p:nvSpPr>
-        <p:spPr>
-          <a:xfrm>
-            <a:off x="594360" y="3529584"/>
-            <a:ext cx="11002975" cy="685800"/>
-          </a:xfrm>
-          <a:prstGeom prst="rect">
-            <a:avLst/>
-          </a:prstGeom>
-          <a:noFill/>
-        </p:spPr>
-        <p:txBody>
-          <a:bodyPr wrap="square">
-            <a:spAutoFit/>
-          </a:bodyPr>
-          <a:lstStyle/>
-          <a:p>
-            <a:pPr algn="ctr"/>
-            <a:r>
-              <a:rPr sz="4400" b="1" i="0">
+              <a:rPr sz="4800" b="1" i="0">
                 <a:solidFill>
                   <a:srgbClr val="FFFFFF"/>
                 </a:solidFill>
                 <a:latin typeface="Arial"/>
               </a:rPr>
               <a:t>Cristo, pela eternidade eterno</a:t>
-            </a:r>
-          </a:p>
-        </p:txBody>
-      </p:sp>
-      <p:sp>
-        <p:nvSpPr>
-          <p:cNvPr id="5" name="TextBox 4"/>
-          <p:cNvSpPr txBox="1"/>
-          <p:nvPr/>
-        </p:nvSpPr>
-        <p:spPr>
-          <a:xfrm>
-            <a:off x="594360" y="4251960"/>
-            <a:ext cx="11002975" cy="347472"/>
-          </a:xfrm>
-          <a:prstGeom prst="rect">
-            <a:avLst/>
-          </a:prstGeom>
-          <a:noFill/>
-        </p:spPr>
-        <p:txBody>
-          <a:bodyPr wrap="square">
-            <a:spAutoFit/>
-          </a:bodyPr>
-          <a:lstStyle/>
-          <a:p>
-            <a:pPr algn="ctr"/>
-            <a:r>
-              <a:rPr sz="2200" b="0" i="1">
-                <a:solidFill>
-                  <a:srgbClr val="8C8C8C"/>
-                </a:solidFill>
-                <a:latin typeface="Arial"/>
-              </a:rPr>
-              <a:t/>
             </a:r>
           </a:p>
         </p:txBody>
@@ -6148,8 +4923,8 @@
         </p:nvSpPr>
         <p:spPr>
           <a:xfrm>
-            <a:off x="594360" y="2258568"/>
-            <a:ext cx="11002975" cy="685800"/>
+            <a:off x="640080" y="2052828"/>
+            <a:ext cx="10911535" cy="731520"/>
           </a:xfrm>
           <a:prstGeom prst="rect">
             <a:avLst/>
@@ -6164,7 +4939,7 @@
           <a:p>
             <a:pPr algn="ctr"/>
             <a:r>
-              <a:rPr sz="4400" b="1" i="0">
+              <a:rPr sz="4800" b="1" i="0">
                 <a:solidFill>
                   <a:srgbClr val="FFFFFF"/>
                 </a:solidFill>
@@ -6183,8 +4958,8 @@
         </p:nvSpPr>
         <p:spPr>
           <a:xfrm>
-            <a:off x="594360" y="2980944"/>
-            <a:ext cx="11002975" cy="347472"/>
+            <a:off x="640080" y="2985516"/>
+            <a:ext cx="10911535" cy="731520"/>
           </a:xfrm>
           <a:prstGeom prst="rect">
             <a:avLst/>
@@ -6199,83 +4974,13 @@
           <a:p>
             <a:pPr algn="ctr"/>
             <a:r>
-              <a:rPr sz="2200" b="0" i="1">
-                <a:solidFill>
-                  <a:srgbClr val="8C8C8C"/>
-                </a:solidFill>
-                <a:latin typeface="Arial"/>
-              </a:rPr>
-              <a:t/>
-            </a:r>
-          </a:p>
-        </p:txBody>
-      </p:sp>
-      <p:sp>
-        <p:nvSpPr>
-          <p:cNvPr id="4" name="TextBox 3"/>
-          <p:cNvSpPr txBox="1"/>
-          <p:nvPr/>
-        </p:nvSpPr>
-        <p:spPr>
-          <a:xfrm>
-            <a:off x="594360" y="3529584"/>
-            <a:ext cx="11002975" cy="685800"/>
-          </a:xfrm>
-          <a:prstGeom prst="rect">
-            <a:avLst/>
-          </a:prstGeom>
-          <a:noFill/>
-        </p:spPr>
-        <p:txBody>
-          <a:bodyPr wrap="square">
-            <a:spAutoFit/>
-          </a:bodyPr>
-          <a:lstStyle/>
-          <a:p>
-            <a:pPr algn="ctr"/>
-            <a:r>
-              <a:rPr sz="4400" b="1" i="0">
+              <a:rPr sz="4800" b="1" i="0">
                 <a:solidFill>
                   <a:srgbClr val="FFFFFF"/>
                 </a:solidFill>
                 <a:latin typeface="Arial"/>
               </a:rPr>
               <a:t>Jesus, nosso Emanuel vela</a:t>
-            </a:r>
-          </a:p>
-        </p:txBody>
-      </p:sp>
-      <p:sp>
-        <p:nvSpPr>
-          <p:cNvPr id="5" name="TextBox 4"/>
-          <p:cNvSpPr txBox="1"/>
-          <p:nvPr/>
-        </p:nvSpPr>
-        <p:spPr>
-          <a:xfrm>
-            <a:off x="594360" y="4251960"/>
-            <a:ext cx="11002975" cy="347472"/>
-          </a:xfrm>
-          <a:prstGeom prst="rect">
-            <a:avLst/>
-          </a:prstGeom>
-          <a:noFill/>
-        </p:spPr>
-        <p:txBody>
-          <a:bodyPr wrap="square">
-            <a:spAutoFit/>
-          </a:bodyPr>
-          <a:lstStyle/>
-          <a:p>
-            <a:pPr algn="ctr"/>
-            <a:r>
-              <a:rPr sz="2200" b="0" i="1">
-                <a:solidFill>
-                  <a:srgbClr val="8C8C8C"/>
-                </a:solidFill>
-                <a:latin typeface="Arial"/>
-              </a:rPr>
-              <a:t/>
             </a:r>
           </a:p>
         </p:txBody>
@@ -6314,8 +5019,8 @@
         </p:nvSpPr>
         <p:spPr>
           <a:xfrm>
-            <a:off x="594360" y="2258568"/>
-            <a:ext cx="11002975" cy="685800"/>
+            <a:off x="640080" y="2052828"/>
+            <a:ext cx="10911535" cy="731520"/>
           </a:xfrm>
           <a:prstGeom prst="rect">
             <a:avLst/>
@@ -6330,7 +5035,7 @@
           <a:p>
             <a:pPr algn="ctr"/>
             <a:r>
-              <a:rPr sz="4400" b="1" i="0">
+              <a:rPr sz="4800" b="1" i="0">
                 <a:solidFill>
                   <a:srgbClr val="FFFFFF"/>
                 </a:solidFill>
@@ -6349,8 +5054,8 @@
         </p:nvSpPr>
         <p:spPr>
           <a:xfrm>
-            <a:off x="594360" y="2980944"/>
-            <a:ext cx="11002975" cy="347472"/>
+            <a:off x="640080" y="2985516"/>
+            <a:ext cx="10911535" cy="731520"/>
           </a:xfrm>
           <a:prstGeom prst="rect">
             <a:avLst/>
@@ -6365,83 +5070,13 @@
           <a:p>
             <a:pPr algn="ctr"/>
             <a:r>
-              <a:rPr sz="2200" b="0" i="1">
-                <a:solidFill>
-                  <a:srgbClr val="8C8C8C"/>
-                </a:solidFill>
-                <a:latin typeface="Arial"/>
-              </a:rPr>
-              <a:t/>
-            </a:r>
-          </a:p>
-        </p:txBody>
-      </p:sp>
-      <p:sp>
-        <p:nvSpPr>
-          <p:cNvPr id="4" name="TextBox 3"/>
-          <p:cNvSpPr txBox="1"/>
-          <p:nvPr/>
-        </p:nvSpPr>
-        <p:spPr>
-          <a:xfrm>
-            <a:off x="594360" y="3529584"/>
-            <a:ext cx="11002975" cy="685800"/>
-          </a:xfrm>
-          <a:prstGeom prst="rect">
-            <a:avLst/>
-          </a:prstGeom>
-          <a:noFill/>
-        </p:spPr>
-        <p:txBody>
-          <a:bodyPr wrap="square">
-            <a:spAutoFit/>
-          </a:bodyPr>
-          <a:lstStyle/>
-          <a:p>
-            <a:pPr algn="ctr"/>
-            <a:r>
-              <a:rPr sz="4400" b="1" i="0">
+              <a:rPr sz="4800" b="1" i="0">
                 <a:solidFill>
                   <a:srgbClr val="FFFFFF"/>
                 </a:solidFill>
                 <a:latin typeface="Arial"/>
               </a:rPr>
               <a:t>Brandamente no silêncio chega</a:t>
-            </a:r>
-          </a:p>
-        </p:txBody>
-      </p:sp>
-      <p:sp>
-        <p:nvSpPr>
-          <p:cNvPr id="5" name="TextBox 4"/>
-          <p:cNvSpPr txBox="1"/>
-          <p:nvPr/>
-        </p:nvSpPr>
-        <p:spPr>
-          <a:xfrm>
-            <a:off x="594360" y="4251960"/>
-            <a:ext cx="11002975" cy="347472"/>
-          </a:xfrm>
-          <a:prstGeom prst="rect">
-            <a:avLst/>
-          </a:prstGeom>
-          <a:noFill/>
-        </p:spPr>
-        <p:txBody>
-          <a:bodyPr wrap="square">
-            <a:spAutoFit/>
-          </a:bodyPr>
-          <a:lstStyle/>
-          <a:p>
-            <a:pPr algn="ctr"/>
-            <a:r>
-              <a:rPr sz="2200" b="0" i="1">
-                <a:solidFill>
-                  <a:srgbClr val="8C8C8C"/>
-                </a:solidFill>
-                <a:latin typeface="Arial"/>
-              </a:rPr>
-              <a:t/>
             </a:r>
           </a:p>
         </p:txBody>
@@ -6480,8 +5115,8 @@
         </p:nvSpPr>
         <p:spPr>
           <a:xfrm>
-            <a:off x="594360" y="2258568"/>
-            <a:ext cx="11002975" cy="685800"/>
+            <a:off x="640080" y="2052828"/>
+            <a:ext cx="10911535" cy="731520"/>
           </a:xfrm>
           <a:prstGeom prst="rect">
             <a:avLst/>
@@ -6496,7 +5131,7 @@
           <a:p>
             <a:pPr algn="ctr"/>
             <a:r>
-              <a:rPr sz="4400" b="1" i="0">
+              <a:rPr sz="4800" b="1" i="0">
                 <a:solidFill>
                   <a:srgbClr val="FFFFFF"/>
                 </a:solidFill>
@@ -6515,8 +5150,8 @@
         </p:nvSpPr>
         <p:spPr>
           <a:xfrm>
-            <a:off x="594360" y="2980944"/>
-            <a:ext cx="11002975" cy="347472"/>
+            <a:off x="640080" y="2985516"/>
+            <a:ext cx="10911535" cy="731520"/>
           </a:xfrm>
           <a:prstGeom prst="rect">
             <a:avLst/>
@@ -6531,83 +5166,13 @@
           <a:p>
             <a:pPr algn="ctr"/>
             <a:r>
-              <a:rPr sz="2200" b="0" i="1">
-                <a:solidFill>
-                  <a:srgbClr val="8C8C8C"/>
-                </a:solidFill>
-                <a:latin typeface="Arial"/>
-              </a:rPr>
-              <a:t/>
-            </a:r>
-          </a:p>
-        </p:txBody>
-      </p:sp>
-      <p:sp>
-        <p:nvSpPr>
-          <p:cNvPr id="4" name="TextBox 3"/>
-          <p:cNvSpPr txBox="1"/>
-          <p:nvPr/>
-        </p:nvSpPr>
-        <p:spPr>
-          <a:xfrm>
-            <a:off x="594360" y="3529584"/>
-            <a:ext cx="11002975" cy="685800"/>
-          </a:xfrm>
-          <a:prstGeom prst="rect">
-            <a:avLst/>
-          </a:prstGeom>
-          <a:noFill/>
-        </p:spPr>
-        <p:txBody>
-          <a:bodyPr wrap="square">
-            <a:spAutoFit/>
-          </a:bodyPr>
-          <a:lstStyle/>
-          <a:p>
-            <a:pPr algn="ctr"/>
-            <a:r>
-              <a:rPr sz="4400" b="1" i="0">
+              <a:rPr sz="4800" b="1" i="0">
                 <a:solidFill>
                   <a:srgbClr val="FFFFFF"/>
                 </a:solidFill>
                 <a:latin typeface="Arial"/>
               </a:rPr>
               <a:t>Ressurge com cura nas asas</a:t>
-            </a:r>
-          </a:p>
-        </p:txBody>
-      </p:sp>
-      <p:sp>
-        <p:nvSpPr>
-          <p:cNvPr id="5" name="TextBox 4"/>
-          <p:cNvSpPr txBox="1"/>
-          <p:nvPr/>
-        </p:nvSpPr>
-        <p:spPr>
-          <a:xfrm>
-            <a:off x="594360" y="4251960"/>
-            <a:ext cx="11002975" cy="347472"/>
-          </a:xfrm>
-          <a:prstGeom prst="rect">
-            <a:avLst/>
-          </a:prstGeom>
-          <a:noFill/>
-        </p:spPr>
-        <p:txBody>
-          <a:bodyPr wrap="square">
-            <a:spAutoFit/>
-          </a:bodyPr>
-          <a:lstStyle/>
-          <a:p>
-            <a:pPr algn="ctr"/>
-            <a:r>
-              <a:rPr sz="2200" b="0" i="1">
-                <a:solidFill>
-                  <a:srgbClr val="8C8C8C"/>
-                </a:solidFill>
-                <a:latin typeface="Arial"/>
-              </a:rPr>
-              <a:t/>
             </a:r>
           </a:p>
         </p:txBody>
@@ -6646,8 +5211,8 @@
         </p:nvSpPr>
         <p:spPr>
           <a:xfrm>
-            <a:off x="594360" y="2258568"/>
-            <a:ext cx="11002975" cy="685800"/>
+            <a:off x="640080" y="2052828"/>
+            <a:ext cx="10911535" cy="731520"/>
           </a:xfrm>
           <a:prstGeom prst="rect">
             <a:avLst/>
@@ -6662,7 +5227,7 @@
           <a:p>
             <a:pPr algn="ctr"/>
             <a:r>
-              <a:rPr sz="4400" b="1" i="0">
+              <a:rPr sz="4800" b="1" i="0">
                 <a:solidFill>
                   <a:srgbClr val="FFFFFF"/>
                 </a:solidFill>
@@ -6681,8 +5246,8 @@
         </p:nvSpPr>
         <p:spPr>
           <a:xfrm>
-            <a:off x="594360" y="2980944"/>
-            <a:ext cx="11002975" cy="347472"/>
+            <a:off x="640080" y="2985516"/>
+            <a:ext cx="10911535" cy="731520"/>
           </a:xfrm>
           <a:prstGeom prst="rect">
             <a:avLst/>
@@ -6697,83 +5262,13 @@
           <a:p>
             <a:pPr algn="ctr"/>
             <a:r>
-              <a:rPr sz="2200" b="0" i="1">
-                <a:solidFill>
-                  <a:srgbClr val="8C8C8C"/>
-                </a:solidFill>
-                <a:latin typeface="Arial"/>
-              </a:rPr>
-              <a:t/>
-            </a:r>
-          </a:p>
-        </p:txBody>
-      </p:sp>
-      <p:sp>
-        <p:nvSpPr>
-          <p:cNvPr id="4" name="TextBox 3"/>
-          <p:cNvSpPr txBox="1"/>
-          <p:nvPr/>
-        </p:nvSpPr>
-        <p:spPr>
-          <a:xfrm>
-            <a:off x="594360" y="3529584"/>
-            <a:ext cx="11002975" cy="685800"/>
-          </a:xfrm>
-          <a:prstGeom prst="rect">
-            <a:avLst/>
-          </a:prstGeom>
-          <a:noFill/>
-        </p:spPr>
-        <p:txBody>
-          <a:bodyPr wrap="square">
-            <a:spAutoFit/>
-          </a:bodyPr>
-          <a:lstStyle/>
-          <a:p>
-            <a:pPr algn="ctr"/>
-            <a:r>
-              <a:rPr sz="4400" b="1" i="0">
+              <a:rPr sz="4800" b="1" i="0">
                 <a:solidFill>
                   <a:srgbClr val="FFFFFF"/>
                 </a:solidFill>
                 <a:latin typeface="Arial"/>
               </a:rPr>
               <a:t>Ouvi o arauto, os anjos cantam</a:t>
-            </a:r>
-          </a:p>
-        </p:txBody>
-      </p:sp>
-      <p:sp>
-        <p:nvSpPr>
-          <p:cNvPr id="5" name="TextBox 4"/>
-          <p:cNvSpPr txBox="1"/>
-          <p:nvPr/>
-        </p:nvSpPr>
-        <p:spPr>
-          <a:xfrm>
-            <a:off x="594360" y="4251960"/>
-            <a:ext cx="11002975" cy="347472"/>
-          </a:xfrm>
-          <a:prstGeom prst="rect">
-            <a:avLst/>
-          </a:prstGeom>
-          <a:noFill/>
-        </p:spPr>
-        <p:txBody>
-          <a:bodyPr wrap="square">
-            <a:spAutoFit/>
-          </a:bodyPr>
-          <a:lstStyle/>
-          <a:p>
-            <a:pPr algn="ctr"/>
-            <a:r>
-              <a:rPr sz="2200" b="0" i="1">
-                <a:solidFill>
-                  <a:srgbClr val="8C8C8C"/>
-                </a:solidFill>
-                <a:latin typeface="Arial"/>
-              </a:rPr>
-              <a:t/>
             </a:r>
           </a:p>
         </p:txBody>

--- a/output_pptx/Hark_The_Herald_Angels_Sing.pptx
+++ b/output_pptx/Hark_The_Herald_Angels_Sing.pptx
@@ -3187,6 +3187,76 @@
           </a:p>
         </p:txBody>
       </p:sp>
+      <p:sp>
+        <p:nvSpPr>
+          <p:cNvPr id="4" name="TextBox 3"/>
+          <p:cNvSpPr txBox="1"/>
+          <p:nvPr/>
+        </p:nvSpPr>
+        <p:spPr>
+          <a:xfrm>
+            <a:off x="640080" y="4128516"/>
+            <a:ext cx="10911535" cy="310896"/>
+          </a:xfrm>
+          <a:prstGeom prst="rect">
+            <a:avLst/>
+          </a:prstGeom>
+          <a:noFill/>
+        </p:spPr>
+        <p:txBody>
+          <a:bodyPr wrap="square">
+            <a:spAutoFit/>
+          </a:bodyPr>
+          <a:lstStyle/>
+          <a:p>
+            <a:pPr algn="ctr"/>
+            <a:r>
+              <a:rPr sz="2000" b="0" i="0">
+                <a:solidFill>
+                  <a:srgbClr val="828282"/>
+                </a:solidFill>
+                <a:latin typeface="Arial"/>
+              </a:rPr>
+              <a:t>新しく生まれた王に栄光あれ！</a:t>
+            </a:r>
+          </a:p>
+        </p:txBody>
+      </p:sp>
+      <p:sp>
+        <p:nvSpPr>
+          <p:cNvPr id="5" name="TextBox 4"/>
+          <p:cNvSpPr txBox="1"/>
+          <p:nvPr/>
+        </p:nvSpPr>
+        <p:spPr>
+          <a:xfrm>
+            <a:off x="640080" y="4494276"/>
+            <a:ext cx="10911535" cy="310896"/>
+          </a:xfrm>
+          <a:prstGeom prst="rect">
+            <a:avLst/>
+          </a:prstGeom>
+          <a:noFill/>
+        </p:spPr>
+        <p:txBody>
+          <a:bodyPr wrap="square">
+            <a:spAutoFit/>
+          </a:bodyPr>
+          <a:lstStyle/>
+          <a:p>
+            <a:pPr algn="ctr"/>
+            <a:r>
+              <a:rPr sz="2000" b="0" i="0">
+                <a:solidFill>
+                  <a:srgbClr val="828282"/>
+                </a:solidFill>
+                <a:latin typeface="Arial"/>
+              </a:rPr>
+              <a:t>地に平和を、優しきみ恵みを</a:t>
+            </a:r>
+          </a:p>
+        </p:txBody>
+      </p:sp>
     </p:spTree>
   </p:cSld>
   <p:clrMapOvr>
@@ -3283,6 +3353,76 @@
           </a:p>
         </p:txBody>
       </p:sp>
+      <p:sp>
+        <p:nvSpPr>
+          <p:cNvPr id="4" name="TextBox 3"/>
+          <p:cNvSpPr txBox="1"/>
+          <p:nvPr/>
+        </p:nvSpPr>
+        <p:spPr>
+          <a:xfrm>
+            <a:off x="640080" y="4128516"/>
+            <a:ext cx="10911535" cy="310896"/>
+          </a:xfrm>
+          <a:prstGeom prst="rect">
+            <a:avLst/>
+          </a:prstGeom>
+          <a:noFill/>
+        </p:spPr>
+        <p:txBody>
+          <a:bodyPr wrap="square">
+            <a:spAutoFit/>
+          </a:bodyPr>
+          <a:lstStyle/>
+          <a:p>
+            <a:pPr algn="ctr"/>
+            <a:r>
+              <a:rPr sz="2000" b="0" i="0">
+                <a:solidFill>
+                  <a:srgbClr val="828282"/>
+                </a:solidFill>
+                <a:latin typeface="Arial"/>
+              </a:rPr>
+              <a:t>新しく生まれた王に栄光あれ！</a:t>
+            </a:r>
+          </a:p>
+        </p:txBody>
+      </p:sp>
+      <p:sp>
+        <p:nvSpPr>
+          <p:cNvPr id="5" name="TextBox 4"/>
+          <p:cNvSpPr txBox="1"/>
+          <p:nvPr/>
+        </p:nvSpPr>
+        <p:spPr>
+          <a:xfrm>
+            <a:off x="640080" y="4494276"/>
+            <a:ext cx="10911535" cy="310896"/>
+          </a:xfrm>
+          <a:prstGeom prst="rect">
+            <a:avLst/>
+          </a:prstGeom>
+          <a:noFill/>
+        </p:spPr>
+        <p:txBody>
+          <a:bodyPr wrap="square">
+            <a:spAutoFit/>
+          </a:bodyPr>
+          <a:lstStyle/>
+          <a:p>
+            <a:pPr algn="ctr"/>
+            <a:r>
+              <a:rPr sz="2000" b="0" i="0">
+                <a:solidFill>
+                  <a:srgbClr val="828282"/>
+                </a:solidFill>
+                <a:latin typeface="Arial"/>
+              </a:rPr>
+              <a:t>すべての国よ、喜びたたえよ</a:t>
+            </a:r>
+          </a:p>
+        </p:txBody>
+      </p:sp>
     </p:spTree>
   </p:cSld>
   <p:clrMapOvr>
@@ -3379,6 +3519,76 @@
           </a:p>
         </p:txBody>
       </p:sp>
+      <p:sp>
+        <p:nvSpPr>
+          <p:cNvPr id="4" name="TextBox 3"/>
+          <p:cNvSpPr txBox="1"/>
+          <p:nvPr/>
+        </p:nvSpPr>
+        <p:spPr>
+          <a:xfrm>
+            <a:off x="640080" y="4128516"/>
+            <a:ext cx="10911535" cy="310896"/>
+          </a:xfrm>
+          <a:prstGeom prst="rect">
+            <a:avLst/>
+          </a:prstGeom>
+          <a:noFill/>
+        </p:spPr>
+        <p:txBody>
+          <a:bodyPr wrap="square">
+            <a:spAutoFit/>
+          </a:bodyPr>
+          <a:lstStyle/>
+          <a:p>
+            <a:pPr algn="ctr"/>
+            <a:r>
+              <a:rPr sz="2000" b="0" i="0">
+                <a:solidFill>
+                  <a:srgbClr val="828282"/>
+                </a:solidFill>
+                <a:latin typeface="Arial"/>
+              </a:rPr>
+              <a:t>新しく生まれた王に栄光あれ！</a:t>
+            </a:r>
+          </a:p>
+        </p:txBody>
+      </p:sp>
+      <p:sp>
+        <p:nvSpPr>
+          <p:cNvPr id="5" name="TextBox 4"/>
+          <p:cNvSpPr txBox="1"/>
+          <p:nvPr/>
+        </p:nvSpPr>
+        <p:spPr>
+          <a:xfrm>
+            <a:off x="640080" y="4494276"/>
+            <a:ext cx="10911535" cy="310896"/>
+          </a:xfrm>
+          <a:prstGeom prst="rect">
+            <a:avLst/>
+          </a:prstGeom>
+          <a:noFill/>
+        </p:spPr>
+        <p:txBody>
+          <a:bodyPr wrap="square">
+            <a:spAutoFit/>
+          </a:bodyPr>
+          <a:lstStyle/>
+          <a:p>
+            <a:pPr algn="ctr"/>
+            <a:r>
+              <a:rPr sz="2000" b="0" i="0">
+                <a:solidFill>
+                  <a:srgbClr val="828282"/>
+                </a:solidFill>
+                <a:latin typeface="Arial"/>
+              </a:rPr>
+              <a:t>地に平和を、優しきみ恵みを</a:t>
+            </a:r>
+          </a:p>
+        </p:txBody>
+      </p:sp>
     </p:spTree>
   </p:cSld>
   <p:clrMapOvr>
@@ -3475,6 +3685,76 @@
           </a:p>
         </p:txBody>
       </p:sp>
+      <p:sp>
+        <p:nvSpPr>
+          <p:cNvPr id="4" name="TextBox 3"/>
+          <p:cNvSpPr txBox="1"/>
+          <p:nvPr/>
+        </p:nvSpPr>
+        <p:spPr>
+          <a:xfrm>
+            <a:off x="640080" y="4128516"/>
+            <a:ext cx="10911535" cy="310896"/>
+          </a:xfrm>
+          <a:prstGeom prst="rect">
+            <a:avLst/>
+          </a:prstGeom>
+          <a:noFill/>
+        </p:spPr>
+        <p:txBody>
+          <a:bodyPr wrap="square">
+            <a:spAutoFit/>
+          </a:bodyPr>
+          <a:lstStyle/>
+          <a:p>
+            <a:pPr algn="ctr"/>
+            <a:r>
+              <a:rPr sz="2000" b="0" i="0">
+                <a:solidFill>
+                  <a:srgbClr val="828282"/>
+                </a:solidFill>
+                <a:latin typeface="Arial"/>
+              </a:rPr>
+              <a:t>神と罪人が和解せり</a:t>
+            </a:r>
+          </a:p>
+        </p:txBody>
+      </p:sp>
+      <p:sp>
+        <p:nvSpPr>
+          <p:cNvPr id="5" name="TextBox 4"/>
+          <p:cNvSpPr txBox="1"/>
+          <p:nvPr/>
+        </p:nvSpPr>
+        <p:spPr>
+          <a:xfrm>
+            <a:off x="640080" y="4494276"/>
+            <a:ext cx="10911535" cy="310896"/>
+          </a:xfrm>
+          <a:prstGeom prst="rect">
+            <a:avLst/>
+          </a:prstGeom>
+          <a:noFill/>
+        </p:spPr>
+        <p:txBody>
+          <a:bodyPr wrap="square">
+            <a:spAutoFit/>
+          </a:bodyPr>
+          <a:lstStyle/>
+          <a:p>
+            <a:pPr algn="ctr"/>
+            <a:r>
+              <a:rPr sz="2000" b="0" i="0">
+                <a:solidFill>
+                  <a:srgbClr val="828282"/>
+                </a:solidFill>
+                <a:latin typeface="Arial"/>
+              </a:rPr>
+              <a:t>すべての国よ、喜びたたえよ</a:t>
+            </a:r>
+          </a:p>
+        </p:txBody>
+      </p:sp>
     </p:spTree>
   </p:cSld>
   <p:clrMapOvr>
@@ -3571,6 +3851,76 @@
           </a:p>
         </p:txBody>
       </p:sp>
+      <p:sp>
+        <p:nvSpPr>
+          <p:cNvPr id="4" name="TextBox 3"/>
+          <p:cNvSpPr txBox="1"/>
+          <p:nvPr/>
+        </p:nvSpPr>
+        <p:spPr>
+          <a:xfrm>
+            <a:off x="640080" y="4128516"/>
+            <a:ext cx="10911535" cy="310896"/>
+          </a:xfrm>
+          <a:prstGeom prst="rect">
+            <a:avLst/>
+          </a:prstGeom>
+          <a:noFill/>
+        </p:spPr>
+        <p:txBody>
+          <a:bodyPr wrap="square">
+            <a:spAutoFit/>
+          </a:bodyPr>
+          <a:lstStyle/>
+          <a:p>
+            <a:pPr algn="ctr"/>
+            <a:r>
+              <a:rPr sz="2000" b="0" i="0">
+                <a:solidFill>
+                  <a:srgbClr val="828282"/>
+                </a:solidFill>
+                <a:latin typeface="Arial"/>
+              </a:rPr>
+              <a:t>天の勝利に合わせよ</a:t>
+            </a:r>
+          </a:p>
+        </p:txBody>
+      </p:sp>
+      <p:sp>
+        <p:nvSpPr>
+          <p:cNvPr id="5" name="TextBox 4"/>
+          <p:cNvSpPr txBox="1"/>
+          <p:nvPr/>
+        </p:nvSpPr>
+        <p:spPr>
+          <a:xfrm>
+            <a:off x="640080" y="4494276"/>
+            <a:ext cx="10911535" cy="310896"/>
+          </a:xfrm>
+          <a:prstGeom prst="rect">
+            <a:avLst/>
+          </a:prstGeom>
+          <a:noFill/>
+        </p:spPr>
+        <p:txBody>
+          <a:bodyPr wrap="square">
+            <a:spAutoFit/>
+          </a:bodyPr>
+          <a:lstStyle/>
+          <a:p>
+            <a:pPr algn="ctr"/>
+            <a:r>
+              <a:rPr sz="2000" b="0" i="0">
+                <a:solidFill>
+                  <a:srgbClr val="828282"/>
+                </a:solidFill>
+                <a:latin typeface="Arial"/>
+              </a:rPr>
+              <a:t>天使の軍勢と共に宣べ伝えよ</a:t>
+            </a:r>
+          </a:p>
+        </p:txBody>
+      </p:sp>
     </p:spTree>
   </p:cSld>
   <p:clrMapOvr>
@@ -3667,6 +4017,76 @@
           </a:p>
         </p:txBody>
       </p:sp>
+      <p:sp>
+        <p:nvSpPr>
+          <p:cNvPr id="4" name="TextBox 3"/>
+          <p:cNvSpPr txBox="1"/>
+          <p:nvPr/>
+        </p:nvSpPr>
+        <p:spPr>
+          <a:xfrm>
+            <a:off x="640080" y="4128516"/>
+            <a:ext cx="10911535" cy="310896"/>
+          </a:xfrm>
+          <a:prstGeom prst="rect">
+            <a:avLst/>
+          </a:prstGeom>
+          <a:noFill/>
+        </p:spPr>
+        <p:txBody>
+          <a:bodyPr wrap="square">
+            <a:spAutoFit/>
+          </a:bodyPr>
+          <a:lstStyle/>
+          <a:p>
+            <a:pPr algn="ctr"/>
+            <a:r>
+              <a:rPr sz="2000" b="0" i="0">
+                <a:solidFill>
+                  <a:srgbClr val="828282"/>
+                </a:solidFill>
+                <a:latin typeface="Arial"/>
+              </a:rPr>
+              <a:t>キリスト、ベツレヘムに生まれたり！</a:t>
+            </a:r>
+          </a:p>
+        </p:txBody>
+      </p:sp>
+      <p:sp>
+        <p:nvSpPr>
+          <p:cNvPr id="5" name="TextBox 4"/>
+          <p:cNvSpPr txBox="1"/>
+          <p:nvPr/>
+        </p:nvSpPr>
+        <p:spPr>
+          <a:xfrm>
+            <a:off x="640080" y="4494276"/>
+            <a:ext cx="10911535" cy="310896"/>
+          </a:xfrm>
+          <a:prstGeom prst="rect">
+            <a:avLst/>
+          </a:prstGeom>
+          <a:noFill/>
+        </p:spPr>
+        <p:txBody>
+          <a:bodyPr wrap="square">
+            <a:spAutoFit/>
+          </a:bodyPr>
+          <a:lstStyle/>
+          <a:p>
+            <a:pPr algn="ctr"/>
+            <a:r>
+              <a:rPr sz="2000" b="0" i="0">
+                <a:solidFill>
+                  <a:srgbClr val="828282"/>
+                </a:solidFill>
+                <a:latin typeface="Arial"/>
+              </a:rPr>
+              <a:t>聞け、御使いたち歌いて</a:t>
+            </a:r>
+          </a:p>
+        </p:txBody>
+      </p:sp>
     </p:spTree>
   </p:cSld>
   <p:clrMapOvr>
@@ -3763,6 +4183,76 @@
           </a:p>
         </p:txBody>
       </p:sp>
+      <p:sp>
+        <p:nvSpPr>
+          <p:cNvPr id="4" name="TextBox 3"/>
+          <p:cNvSpPr txBox="1"/>
+          <p:nvPr/>
+        </p:nvSpPr>
+        <p:spPr>
+          <a:xfrm>
+            <a:off x="640080" y="4128516"/>
+            <a:ext cx="10911535" cy="310896"/>
+          </a:xfrm>
+          <a:prstGeom prst="rect">
+            <a:avLst/>
+          </a:prstGeom>
+          <a:noFill/>
+        </p:spPr>
+        <p:txBody>
+          <a:bodyPr wrap="square">
+            <a:spAutoFit/>
+          </a:bodyPr>
+          <a:lstStyle/>
+          <a:p>
+            <a:pPr algn="ctr"/>
+            <a:r>
+              <a:rPr sz="2000" b="0" i="0">
+                <a:solidFill>
+                  <a:srgbClr val="828282"/>
+                </a:solidFill>
+                <a:latin typeface="Arial"/>
+              </a:rPr>
+              <a:t>新しく生まれた王に栄光あれ！</a:t>
+            </a:r>
+          </a:p>
+        </p:txBody>
+      </p:sp>
+      <p:sp>
+        <p:nvSpPr>
+          <p:cNvPr id="5" name="TextBox 4"/>
+          <p:cNvSpPr txBox="1"/>
+          <p:nvPr/>
+        </p:nvSpPr>
+        <p:spPr>
+          <a:xfrm>
+            <a:off x="640080" y="4494276"/>
+            <a:ext cx="10911535" cy="310896"/>
+          </a:xfrm>
+          <a:prstGeom prst="rect">
+            <a:avLst/>
+          </a:prstGeom>
+          <a:noFill/>
+        </p:spPr>
+        <p:txBody>
+          <a:bodyPr wrap="square">
+            <a:spAutoFit/>
+          </a:bodyPr>
+          <a:lstStyle/>
+          <a:p>
+            <a:pPr algn="ctr"/>
+            <a:r>
+              <a:rPr sz="2000" b="0" i="0">
+                <a:solidFill>
+                  <a:srgbClr val="828282"/>
+                </a:solidFill>
+                <a:latin typeface="Arial"/>
+              </a:rPr>
+              <a:t>キリスト、永遠より永遠に</a:t>
+            </a:r>
+          </a:p>
+        </p:txBody>
+      </p:sp>
     </p:spTree>
   </p:cSld>
   <p:clrMapOvr>
@@ -3859,6 +4349,76 @@
           </a:p>
         </p:txBody>
       </p:sp>
+      <p:sp>
+        <p:nvSpPr>
+          <p:cNvPr id="4" name="TextBox 3"/>
+          <p:cNvSpPr txBox="1"/>
+          <p:nvPr/>
+        </p:nvSpPr>
+        <p:spPr>
+          <a:xfrm>
+            <a:off x="640080" y="4128516"/>
+            <a:ext cx="10911535" cy="310896"/>
+          </a:xfrm>
+          <a:prstGeom prst="rect">
+            <a:avLst/>
+          </a:prstGeom>
+          <a:noFill/>
+        </p:spPr>
+        <p:txBody>
+          <a:bodyPr wrap="square">
+            <a:spAutoFit/>
+          </a:bodyPr>
+          <a:lstStyle/>
+          <a:p>
+            <a:pPr algn="ctr"/>
+            <a:r>
+              <a:rPr sz="2000" b="0" i="0">
+                <a:solidFill>
+                  <a:srgbClr val="828282"/>
+                </a:solidFill>
+                <a:latin typeface="Arial"/>
+              </a:rPr>
+              <a:t>肉なりて生まれることを喜びたもう</a:t>
+            </a:r>
+          </a:p>
+        </p:txBody>
+      </p:sp>
+      <p:sp>
+        <p:nvSpPr>
+          <p:cNvPr id="5" name="TextBox 4"/>
+          <p:cNvSpPr txBox="1"/>
+          <p:nvPr/>
+        </p:nvSpPr>
+        <p:spPr>
+          <a:xfrm>
+            <a:off x="640080" y="4494276"/>
+            <a:ext cx="10911535" cy="310896"/>
+          </a:xfrm>
+          <a:prstGeom prst="rect">
+            <a:avLst/>
+          </a:prstGeom>
+          <a:noFill/>
+        </p:spPr>
+        <p:txBody>
+          <a:bodyPr wrap="square">
+            <a:spAutoFit/>
+          </a:bodyPr>
+          <a:lstStyle/>
+          <a:p>
+            <a:pPr algn="ctr"/>
+            <a:r>
+              <a:rPr sz="2000" b="0" i="0">
+                <a:solidFill>
+                  <a:srgbClr val="828282"/>
+                </a:solidFill>
+                <a:latin typeface="Arial"/>
+              </a:rPr>
+              <a:t>イエス、われらのインマヌエルが目を留める</a:t>
+            </a:r>
+          </a:p>
+        </p:txBody>
+      </p:sp>
     </p:spTree>
   </p:cSld>
   <p:clrMapOvr>
@@ -3955,6 +4515,76 @@
           </a:p>
         </p:txBody>
       </p:sp>
+      <p:sp>
+        <p:nvSpPr>
+          <p:cNvPr id="4" name="TextBox 3"/>
+          <p:cNvSpPr txBox="1"/>
+          <p:nvPr/>
+        </p:nvSpPr>
+        <p:spPr>
+          <a:xfrm>
+            <a:off x="640080" y="4128516"/>
+            <a:ext cx="10911535" cy="310896"/>
+          </a:xfrm>
+          <a:prstGeom prst="rect">
+            <a:avLst/>
+          </a:prstGeom>
+          <a:noFill/>
+        </p:spPr>
+        <p:txBody>
+          <a:bodyPr wrap="square">
+            <a:spAutoFit/>
+          </a:bodyPr>
+          <a:lstStyle/>
+          <a:p>
+            <a:pPr algn="ctr"/>
+            <a:r>
+              <a:rPr sz="2000" b="0" i="0">
+                <a:solidFill>
+                  <a:srgbClr val="828282"/>
+                </a:solidFill>
+                <a:latin typeface="Arial"/>
+              </a:rPr>
+              <a:t>肉の垂れ幕に神性を覆いて</a:t>
+            </a:r>
+          </a:p>
+        </p:txBody>
+      </p:sp>
+      <p:sp>
+        <p:nvSpPr>
+          <p:cNvPr id="5" name="TextBox 4"/>
+          <p:cNvSpPr txBox="1"/>
+          <p:nvPr/>
+        </p:nvSpPr>
+        <p:spPr>
+          <a:xfrm>
+            <a:off x="640080" y="4494276"/>
+            <a:ext cx="10911535" cy="310896"/>
+          </a:xfrm>
+          <a:prstGeom prst="rect">
+            <a:avLst/>
+          </a:prstGeom>
+          <a:noFill/>
+        </p:spPr>
+        <p:txBody>
+          <a:bodyPr wrap="square">
+            <a:spAutoFit/>
+          </a:bodyPr>
+          <a:lstStyle/>
+          <a:p>
+            <a:pPr algn="ctr"/>
+            <a:r>
+              <a:rPr sz="2000" b="0" i="0">
+                <a:solidFill>
+                  <a:srgbClr val="828282"/>
+                </a:solidFill>
+                <a:latin typeface="Arial"/>
+              </a:rPr>
+              <a:t>静寂の中、柔やかに来たりて</a:t>
+            </a:r>
+          </a:p>
+        </p:txBody>
+      </p:sp>
     </p:spTree>
   </p:cSld>
   <p:clrMapOvr>
@@ -4051,6 +4681,76 @@
           </a:p>
         </p:txBody>
       </p:sp>
+      <p:sp>
+        <p:nvSpPr>
+          <p:cNvPr id="4" name="TextBox 3"/>
+          <p:cNvSpPr txBox="1"/>
+          <p:nvPr/>
+        </p:nvSpPr>
+        <p:spPr>
+          <a:xfrm>
+            <a:off x="640080" y="4128516"/>
+            <a:ext cx="10911535" cy="310896"/>
+          </a:xfrm>
+          <a:prstGeom prst="rect">
+            <a:avLst/>
+          </a:prstGeom>
+          <a:noFill/>
+        </p:spPr>
+        <p:txBody>
+          <a:bodyPr wrap="square">
+            <a:spAutoFit/>
+          </a:bodyPr>
+          <a:lstStyle/>
+          <a:p>
+            <a:pPr algn="ctr"/>
+            <a:r>
+              <a:rPr sz="2000" b="0" i="0">
+                <a:solidFill>
+                  <a:srgbClr val="828282"/>
+                </a:solidFill>
+                <a:latin typeface="Arial"/>
+              </a:rPr>
+              <a:t>義の太陽、光輝きて昇る</a:t>
+            </a:r>
+          </a:p>
+        </p:txBody>
+      </p:sp>
+      <p:sp>
+        <p:nvSpPr>
+          <p:cNvPr id="5" name="TextBox 4"/>
+          <p:cNvSpPr txBox="1"/>
+          <p:nvPr/>
+        </p:nvSpPr>
+        <p:spPr>
+          <a:xfrm>
+            <a:off x="640080" y="4494276"/>
+            <a:ext cx="10911535" cy="310896"/>
+          </a:xfrm>
+          <a:prstGeom prst="rect">
+            <a:avLst/>
+          </a:prstGeom>
+          <a:noFill/>
+        </p:spPr>
+        <p:txBody>
+          <a:bodyPr wrap="square">
+            <a:spAutoFit/>
+          </a:bodyPr>
+          <a:lstStyle/>
+          <a:p>
+            <a:pPr algn="ctr"/>
+            <a:r>
+              <a:rPr sz="2000" b="0" i="0">
+                <a:solidFill>
+                  <a:srgbClr val="828282"/>
+                </a:solidFill>
+                <a:latin typeface="Arial"/>
+              </a:rPr>
+              <a:t>翼に癒しを携えて再び昇る</a:t>
+            </a:r>
+          </a:p>
+        </p:txBody>
+      </p:sp>
     </p:spTree>
   </p:cSld>
   <p:clrMapOvr>
@@ -4147,6 +4847,76 @@
           </a:p>
         </p:txBody>
       </p:sp>
+      <p:sp>
+        <p:nvSpPr>
+          <p:cNvPr id="4" name="TextBox 3"/>
+          <p:cNvSpPr txBox="1"/>
+          <p:nvPr/>
+        </p:nvSpPr>
+        <p:spPr>
+          <a:xfrm>
+            <a:off x="640080" y="4128516"/>
+            <a:ext cx="10911535" cy="310896"/>
+          </a:xfrm>
+          <a:prstGeom prst="rect">
+            <a:avLst/>
+          </a:prstGeom>
+          <a:noFill/>
+        </p:spPr>
+        <p:txBody>
+          <a:bodyPr wrap="square">
+            <a:spAutoFit/>
+          </a:bodyPr>
+          <a:lstStyle/>
+          <a:p>
+            <a:pPr algn="ctr"/>
+            <a:r>
+              <a:rPr sz="2000" b="0" i="0">
+                <a:solidFill>
+                  <a:srgbClr val="828282"/>
+                </a:solidFill>
+                <a:latin typeface="Arial"/>
+              </a:rPr>
+              <a:t>魂に平和とビジョンを与えたもう</a:t>
+            </a:r>
+          </a:p>
+        </p:txBody>
+      </p:sp>
+      <p:sp>
+        <p:nvSpPr>
+          <p:cNvPr id="5" name="TextBox 4"/>
+          <p:cNvSpPr txBox="1"/>
+          <p:nvPr/>
+        </p:nvSpPr>
+        <p:spPr>
+          <a:xfrm>
+            <a:off x="640080" y="4494276"/>
+            <a:ext cx="10911535" cy="310896"/>
+          </a:xfrm>
+          <a:prstGeom prst="rect">
+            <a:avLst/>
+          </a:prstGeom>
+          <a:noFill/>
+        </p:spPr>
+        <p:txBody>
+          <a:bodyPr wrap="square">
+            <a:spAutoFit/>
+          </a:bodyPr>
+          <a:lstStyle/>
+          <a:p>
+            <a:pPr algn="ctr"/>
+            <a:r>
+              <a:rPr sz="2000" b="0" i="0">
+                <a:solidFill>
+                  <a:srgbClr val="828282"/>
+                </a:solidFill>
+                <a:latin typeface="Arial"/>
+              </a:rPr>
+              <a:t>聞け、御使いたち歌いて</a:t>
+            </a:r>
+          </a:p>
+        </p:txBody>
+      </p:sp>
     </p:spTree>
   </p:cSld>
   <p:clrMapOvr>
@@ -4243,6 +5013,76 @@
           </a:p>
         </p:txBody>
       </p:sp>
+      <p:sp>
+        <p:nvSpPr>
+          <p:cNvPr id="4" name="TextBox 3"/>
+          <p:cNvSpPr txBox="1"/>
+          <p:nvPr/>
+        </p:nvSpPr>
+        <p:spPr>
+          <a:xfrm>
+            <a:off x="640080" y="4128516"/>
+            <a:ext cx="10911535" cy="310896"/>
+          </a:xfrm>
+          <a:prstGeom prst="rect">
+            <a:avLst/>
+          </a:prstGeom>
+          <a:noFill/>
+        </p:spPr>
+        <p:txBody>
+          <a:bodyPr wrap="square">
+            <a:spAutoFit/>
+          </a:bodyPr>
+          <a:lstStyle/>
+          <a:p>
+            <a:pPr algn="ctr"/>
+            <a:r>
+              <a:rPr sz="2000" b="0" i="0">
+                <a:solidFill>
+                  <a:srgbClr val="828282"/>
+                </a:solidFill>
+                <a:latin typeface="Arial"/>
+              </a:rPr>
+              <a:t>神と罪人が和解せり</a:t>
+            </a:r>
+          </a:p>
+        </p:txBody>
+      </p:sp>
+      <p:sp>
+        <p:nvSpPr>
+          <p:cNvPr id="5" name="TextBox 4"/>
+          <p:cNvSpPr txBox="1"/>
+          <p:nvPr/>
+        </p:nvSpPr>
+        <p:spPr>
+          <a:xfrm>
+            <a:off x="640080" y="4494276"/>
+            <a:ext cx="10911535" cy="310896"/>
+          </a:xfrm>
+          <a:prstGeom prst="rect">
+            <a:avLst/>
+          </a:prstGeom>
+          <a:noFill/>
+        </p:spPr>
+        <p:txBody>
+          <a:bodyPr wrap="square">
+            <a:spAutoFit/>
+          </a:bodyPr>
+          <a:lstStyle/>
+          <a:p>
+            <a:pPr algn="ctr"/>
+            <a:r>
+              <a:rPr sz="2000" b="0" i="0">
+                <a:solidFill>
+                  <a:srgbClr val="828282"/>
+                </a:solidFill>
+                <a:latin typeface="Arial"/>
+              </a:rPr>
+              <a:t>すべての国よ、喜びたたえよ</a:t>
+            </a:r>
+          </a:p>
+        </p:txBody>
+      </p:sp>
     </p:spTree>
   </p:cSld>
   <p:clrMapOvr>
@@ -4339,6 +5179,76 @@
           </a:p>
         </p:txBody>
       </p:sp>
+      <p:sp>
+        <p:nvSpPr>
+          <p:cNvPr id="4" name="TextBox 3"/>
+          <p:cNvSpPr txBox="1"/>
+          <p:nvPr/>
+        </p:nvSpPr>
+        <p:spPr>
+          <a:xfrm>
+            <a:off x="640080" y="4128516"/>
+            <a:ext cx="10911535" cy="310896"/>
+          </a:xfrm>
+          <a:prstGeom prst="rect">
+            <a:avLst/>
+          </a:prstGeom>
+          <a:noFill/>
+        </p:spPr>
+        <p:txBody>
+          <a:bodyPr wrap="square">
+            <a:spAutoFit/>
+          </a:bodyPr>
+          <a:lstStyle/>
+          <a:p>
+            <a:pPr algn="ctr"/>
+            <a:r>
+              <a:rPr sz="2000" b="0" i="0">
+                <a:solidFill>
+                  <a:srgbClr val="828282"/>
+                </a:solidFill>
+                <a:latin typeface="Arial"/>
+              </a:rPr>
+              <a:t>新しく生まれた王に栄光あれ！</a:t>
+            </a:r>
+          </a:p>
+        </p:txBody>
+      </p:sp>
+      <p:sp>
+        <p:nvSpPr>
+          <p:cNvPr id="5" name="TextBox 4"/>
+          <p:cNvSpPr txBox="1"/>
+          <p:nvPr/>
+        </p:nvSpPr>
+        <p:spPr>
+          <a:xfrm>
+            <a:off x="640080" y="4494276"/>
+            <a:ext cx="10911535" cy="310896"/>
+          </a:xfrm>
+          <a:prstGeom prst="rect">
+            <a:avLst/>
+          </a:prstGeom>
+          <a:noFill/>
+        </p:spPr>
+        <p:txBody>
+          <a:bodyPr wrap="square">
+            <a:spAutoFit/>
+          </a:bodyPr>
+          <a:lstStyle/>
+          <a:p>
+            <a:pPr algn="ctr"/>
+            <a:r>
+              <a:rPr sz="2000" b="0" i="0">
+                <a:solidFill>
+                  <a:srgbClr val="828282"/>
+                </a:solidFill>
+                <a:latin typeface="Arial"/>
+              </a:rPr>
+              <a:t>すべての国よ、喜びたたえよ</a:t>
+            </a:r>
+          </a:p>
+        </p:txBody>
+      </p:sp>
     </p:spTree>
   </p:cSld>
   <p:clrMapOvr>
@@ -4505,6 +5415,76 @@
           </a:p>
         </p:txBody>
       </p:sp>
+      <p:sp>
+        <p:nvSpPr>
+          <p:cNvPr id="6" name="TextBox 5"/>
+          <p:cNvSpPr txBox="1"/>
+          <p:nvPr/>
+        </p:nvSpPr>
+        <p:spPr>
+          <a:xfrm>
+            <a:off x="640080" y="4530852"/>
+            <a:ext cx="10911535" cy="310896"/>
+          </a:xfrm>
+          <a:prstGeom prst="rect">
+            <a:avLst/>
+          </a:prstGeom>
+          <a:noFill/>
+        </p:spPr>
+        <p:txBody>
+          <a:bodyPr wrap="square">
+            <a:spAutoFit/>
+          </a:bodyPr>
+          <a:lstStyle/>
+          <a:p>
+            <a:pPr algn="ctr"/>
+            <a:r>
+              <a:rPr sz="2000" b="0" i="1">
+                <a:solidFill>
+                  <a:srgbClr val="828282"/>
+                </a:solidFill>
+                <a:latin typeface="Arial"/>
+              </a:rPr>
+              <a:t>Para dar uma vida sem fim</a:t>
+            </a:r>
+          </a:p>
+        </p:txBody>
+      </p:sp>
+      <p:sp>
+        <p:nvSpPr>
+          <p:cNvPr id="7" name="TextBox 6"/>
+          <p:cNvSpPr txBox="1"/>
+          <p:nvPr/>
+        </p:nvSpPr>
+        <p:spPr>
+          <a:xfrm>
+            <a:off x="640080" y="4896612"/>
+            <a:ext cx="10911535" cy="310896"/>
+          </a:xfrm>
+          <a:prstGeom prst="rect">
+            <a:avLst/>
+          </a:prstGeom>
+          <a:noFill/>
+        </p:spPr>
+        <p:txBody>
+          <a:bodyPr wrap="square">
+            <a:spAutoFit/>
+          </a:bodyPr>
+          <a:lstStyle/>
+          <a:p>
+            <a:pPr algn="ctr"/>
+            <a:r>
+              <a:rPr sz="2000" b="0" i="1">
+                <a:solidFill>
+                  <a:srgbClr val="828282"/>
+                </a:solidFill>
+                <a:latin typeface="Arial"/>
+              </a:rPr>
+              <a:t>Agora nasceu...</a:t>
+            </a:r>
+          </a:p>
+        </p:txBody>
+      </p:sp>
     </p:spTree>
   </p:cSld>
   <p:clrMapOvr>
@@ -4601,6 +5581,41 @@
           </a:p>
         </p:txBody>
       </p:sp>
+      <p:sp>
+        <p:nvSpPr>
+          <p:cNvPr id="4" name="TextBox 3"/>
+          <p:cNvSpPr txBox="1"/>
+          <p:nvPr/>
+        </p:nvSpPr>
+        <p:spPr>
+          <a:xfrm>
+            <a:off x="640080" y="4046220"/>
+            <a:ext cx="10911535" cy="310896"/>
+          </a:xfrm>
+          <a:prstGeom prst="rect">
+            <a:avLst/>
+          </a:prstGeom>
+          <a:noFill/>
+        </p:spPr>
+        <p:txBody>
+          <a:bodyPr wrap="square">
+            <a:spAutoFit/>
+          </a:bodyPr>
+          <a:lstStyle/>
+          <a:p>
+            <a:pPr algn="ctr"/>
+            <a:r>
+              <a:rPr sz="2000" b="0" i="1">
+                <a:solidFill>
+                  <a:srgbClr val="828282"/>
+                </a:solidFill>
+                <a:latin typeface="Arial"/>
+              </a:rPr>
+              <a:t>Exaltem a ti</a:t>
+            </a:r>
+          </a:p>
+        </p:txBody>
+      </p:sp>
     </p:spTree>
   </p:cSld>
   <p:clrMapOvr>
@@ -4697,6 +5712,76 @@
           </a:p>
         </p:txBody>
       </p:sp>
+      <p:sp>
+        <p:nvSpPr>
+          <p:cNvPr id="4" name="TextBox 3"/>
+          <p:cNvSpPr txBox="1"/>
+          <p:nvPr/>
+        </p:nvSpPr>
+        <p:spPr>
+          <a:xfrm>
+            <a:off x="640080" y="4128516"/>
+            <a:ext cx="10911535" cy="310896"/>
+          </a:xfrm>
+          <a:prstGeom prst="rect">
+            <a:avLst/>
+          </a:prstGeom>
+          <a:noFill/>
+        </p:spPr>
+        <p:txBody>
+          <a:bodyPr wrap="square">
+            <a:spAutoFit/>
+          </a:bodyPr>
+          <a:lstStyle/>
+          <a:p>
+            <a:pPr algn="ctr"/>
+            <a:r>
+              <a:rPr sz="2000" b="0" i="0">
+                <a:solidFill>
+                  <a:srgbClr val="828282"/>
+                </a:solidFill>
+                <a:latin typeface="Arial"/>
+              </a:rPr>
+              <a:t>天の勝利に合わせよ</a:t>
+            </a:r>
+          </a:p>
+        </p:txBody>
+      </p:sp>
+      <p:sp>
+        <p:nvSpPr>
+          <p:cNvPr id="5" name="TextBox 4"/>
+          <p:cNvSpPr txBox="1"/>
+          <p:nvPr/>
+        </p:nvSpPr>
+        <p:spPr>
+          <a:xfrm>
+            <a:off x="640080" y="4494276"/>
+            <a:ext cx="10911535" cy="310896"/>
+          </a:xfrm>
+          <a:prstGeom prst="rect">
+            <a:avLst/>
+          </a:prstGeom>
+          <a:noFill/>
+        </p:spPr>
+        <p:txBody>
+          <a:bodyPr wrap="square">
+            <a:spAutoFit/>
+          </a:bodyPr>
+          <a:lstStyle/>
+          <a:p>
+            <a:pPr algn="ctr"/>
+            <a:r>
+              <a:rPr sz="2000" b="0" i="0">
+                <a:solidFill>
+                  <a:srgbClr val="828282"/>
+                </a:solidFill>
+                <a:latin typeface="Arial"/>
+              </a:rPr>
+              <a:t>天使の軍勢と共に宣べ伝えよ</a:t>
+            </a:r>
+          </a:p>
+        </p:txBody>
+      </p:sp>
     </p:spTree>
   </p:cSld>
   <p:clrMapOvr>
@@ -4793,6 +5878,76 @@
           </a:p>
         </p:txBody>
       </p:sp>
+      <p:sp>
+        <p:nvSpPr>
+          <p:cNvPr id="4" name="TextBox 3"/>
+          <p:cNvSpPr txBox="1"/>
+          <p:nvPr/>
+        </p:nvSpPr>
+        <p:spPr>
+          <a:xfrm>
+            <a:off x="640080" y="4128516"/>
+            <a:ext cx="10911535" cy="310896"/>
+          </a:xfrm>
+          <a:prstGeom prst="rect">
+            <a:avLst/>
+          </a:prstGeom>
+          <a:noFill/>
+        </p:spPr>
+        <p:txBody>
+          <a:bodyPr wrap="square">
+            <a:spAutoFit/>
+          </a:bodyPr>
+          <a:lstStyle/>
+          <a:p>
+            <a:pPr algn="ctr"/>
+            <a:r>
+              <a:rPr sz="2000" b="0" i="0">
+                <a:solidFill>
+                  <a:srgbClr val="828282"/>
+                </a:solidFill>
+                <a:latin typeface="Arial"/>
+              </a:rPr>
+              <a:t>キリスト、ベツレヘムに生まれたり！</a:t>
+            </a:r>
+          </a:p>
+        </p:txBody>
+      </p:sp>
+      <p:sp>
+        <p:nvSpPr>
+          <p:cNvPr id="5" name="TextBox 4"/>
+          <p:cNvSpPr txBox="1"/>
+          <p:nvPr/>
+        </p:nvSpPr>
+        <p:spPr>
+          <a:xfrm>
+            <a:off x="640080" y="4494276"/>
+            <a:ext cx="10911535" cy="310896"/>
+          </a:xfrm>
+          <a:prstGeom prst="rect">
+            <a:avLst/>
+          </a:prstGeom>
+          <a:noFill/>
+        </p:spPr>
+        <p:txBody>
+          <a:bodyPr wrap="square">
+            <a:spAutoFit/>
+          </a:bodyPr>
+          <a:lstStyle/>
+          <a:p>
+            <a:pPr algn="ctr"/>
+            <a:r>
+              <a:rPr sz="2000" b="0" i="0">
+                <a:solidFill>
+                  <a:srgbClr val="828282"/>
+                </a:solidFill>
+                <a:latin typeface="Arial"/>
+              </a:rPr>
+              <a:t>聞け、御使いたち歌いて</a:t>
+            </a:r>
+          </a:p>
+        </p:txBody>
+      </p:sp>
     </p:spTree>
   </p:cSld>
   <p:clrMapOvr>
@@ -4889,6 +6044,76 @@
           </a:p>
         </p:txBody>
       </p:sp>
+      <p:sp>
+        <p:nvSpPr>
+          <p:cNvPr id="4" name="TextBox 3"/>
+          <p:cNvSpPr txBox="1"/>
+          <p:nvPr/>
+        </p:nvSpPr>
+        <p:spPr>
+          <a:xfrm>
+            <a:off x="640080" y="4128516"/>
+            <a:ext cx="10911535" cy="310896"/>
+          </a:xfrm>
+          <a:prstGeom prst="rect">
+            <a:avLst/>
+          </a:prstGeom>
+          <a:noFill/>
+        </p:spPr>
+        <p:txBody>
+          <a:bodyPr wrap="square">
+            <a:spAutoFit/>
+          </a:bodyPr>
+          <a:lstStyle/>
+          <a:p>
+            <a:pPr algn="ctr"/>
+            <a:r>
+              <a:rPr sz="2000" b="0" i="0">
+                <a:solidFill>
+                  <a:srgbClr val="828282"/>
+                </a:solidFill>
+                <a:latin typeface="Arial"/>
+              </a:rPr>
+              <a:t>新しく生まれた王に栄光あれ！</a:t>
+            </a:r>
+          </a:p>
+        </p:txBody>
+      </p:sp>
+      <p:sp>
+        <p:nvSpPr>
+          <p:cNvPr id="5" name="TextBox 4"/>
+          <p:cNvSpPr txBox="1"/>
+          <p:nvPr/>
+        </p:nvSpPr>
+        <p:spPr>
+          <a:xfrm>
+            <a:off x="640080" y="4494276"/>
+            <a:ext cx="10911535" cy="310896"/>
+          </a:xfrm>
+          <a:prstGeom prst="rect">
+            <a:avLst/>
+          </a:prstGeom>
+          <a:noFill/>
+        </p:spPr>
+        <p:txBody>
+          <a:bodyPr wrap="square">
+            <a:spAutoFit/>
+          </a:bodyPr>
+          <a:lstStyle/>
+          <a:p>
+            <a:pPr algn="ctr"/>
+            <a:r>
+              <a:rPr sz="2000" b="0" i="0">
+                <a:solidFill>
+                  <a:srgbClr val="828282"/>
+                </a:solidFill>
+                <a:latin typeface="Arial"/>
+              </a:rPr>
+              <a:t>キリスト、永遠より永遠に</a:t>
+            </a:r>
+          </a:p>
+        </p:txBody>
+      </p:sp>
     </p:spTree>
   </p:cSld>
   <p:clrMapOvr>
@@ -4985,6 +6210,76 @@
           </a:p>
         </p:txBody>
       </p:sp>
+      <p:sp>
+        <p:nvSpPr>
+          <p:cNvPr id="4" name="TextBox 3"/>
+          <p:cNvSpPr txBox="1"/>
+          <p:nvPr/>
+        </p:nvSpPr>
+        <p:spPr>
+          <a:xfrm>
+            <a:off x="640080" y="4128516"/>
+            <a:ext cx="10911535" cy="310896"/>
+          </a:xfrm>
+          <a:prstGeom prst="rect">
+            <a:avLst/>
+          </a:prstGeom>
+          <a:noFill/>
+        </p:spPr>
+        <p:txBody>
+          <a:bodyPr wrap="square">
+            <a:spAutoFit/>
+          </a:bodyPr>
+          <a:lstStyle/>
+          <a:p>
+            <a:pPr algn="ctr"/>
+            <a:r>
+              <a:rPr sz="2000" b="0" i="0">
+                <a:solidFill>
+                  <a:srgbClr val="828282"/>
+                </a:solidFill>
+                <a:latin typeface="Arial"/>
+              </a:rPr>
+              <a:t>肉なりて生まれることを喜びたもう</a:t>
+            </a:r>
+          </a:p>
+        </p:txBody>
+      </p:sp>
+      <p:sp>
+        <p:nvSpPr>
+          <p:cNvPr id="5" name="TextBox 4"/>
+          <p:cNvSpPr txBox="1"/>
+          <p:nvPr/>
+        </p:nvSpPr>
+        <p:spPr>
+          <a:xfrm>
+            <a:off x="640080" y="4494276"/>
+            <a:ext cx="10911535" cy="310896"/>
+          </a:xfrm>
+          <a:prstGeom prst="rect">
+            <a:avLst/>
+          </a:prstGeom>
+          <a:noFill/>
+        </p:spPr>
+        <p:txBody>
+          <a:bodyPr wrap="square">
+            <a:spAutoFit/>
+          </a:bodyPr>
+          <a:lstStyle/>
+          <a:p>
+            <a:pPr algn="ctr"/>
+            <a:r>
+              <a:rPr sz="2000" b="0" i="0">
+                <a:solidFill>
+                  <a:srgbClr val="828282"/>
+                </a:solidFill>
+                <a:latin typeface="Arial"/>
+              </a:rPr>
+              <a:t>イエス、われらのインマヌエルが目を留める</a:t>
+            </a:r>
+          </a:p>
+        </p:txBody>
+      </p:sp>
     </p:spTree>
   </p:cSld>
   <p:clrMapOvr>
@@ -5081,6 +6376,76 @@
           </a:p>
         </p:txBody>
       </p:sp>
+      <p:sp>
+        <p:nvSpPr>
+          <p:cNvPr id="4" name="TextBox 3"/>
+          <p:cNvSpPr txBox="1"/>
+          <p:nvPr/>
+        </p:nvSpPr>
+        <p:spPr>
+          <a:xfrm>
+            <a:off x="640080" y="4128516"/>
+            <a:ext cx="10911535" cy="310896"/>
+          </a:xfrm>
+          <a:prstGeom prst="rect">
+            <a:avLst/>
+          </a:prstGeom>
+          <a:noFill/>
+        </p:spPr>
+        <p:txBody>
+          <a:bodyPr wrap="square">
+            <a:spAutoFit/>
+          </a:bodyPr>
+          <a:lstStyle/>
+          <a:p>
+            <a:pPr algn="ctr"/>
+            <a:r>
+              <a:rPr sz="2000" b="0" i="0">
+                <a:solidFill>
+                  <a:srgbClr val="828282"/>
+                </a:solidFill>
+                <a:latin typeface="Arial"/>
+              </a:rPr>
+              <a:t>肉の垂れ幕に神性を覆いて</a:t>
+            </a:r>
+          </a:p>
+        </p:txBody>
+      </p:sp>
+      <p:sp>
+        <p:nvSpPr>
+          <p:cNvPr id="5" name="TextBox 4"/>
+          <p:cNvSpPr txBox="1"/>
+          <p:nvPr/>
+        </p:nvSpPr>
+        <p:spPr>
+          <a:xfrm>
+            <a:off x="640080" y="4494276"/>
+            <a:ext cx="10911535" cy="310896"/>
+          </a:xfrm>
+          <a:prstGeom prst="rect">
+            <a:avLst/>
+          </a:prstGeom>
+          <a:noFill/>
+        </p:spPr>
+        <p:txBody>
+          <a:bodyPr wrap="square">
+            <a:spAutoFit/>
+          </a:bodyPr>
+          <a:lstStyle/>
+          <a:p>
+            <a:pPr algn="ctr"/>
+            <a:r>
+              <a:rPr sz="2000" b="0" i="0">
+                <a:solidFill>
+                  <a:srgbClr val="828282"/>
+                </a:solidFill>
+                <a:latin typeface="Arial"/>
+              </a:rPr>
+              <a:t>静寂の中、柔やかに来たりて</a:t>
+            </a:r>
+          </a:p>
+        </p:txBody>
+      </p:sp>
     </p:spTree>
   </p:cSld>
   <p:clrMapOvr>
@@ -5177,6 +6542,76 @@
           </a:p>
         </p:txBody>
       </p:sp>
+      <p:sp>
+        <p:nvSpPr>
+          <p:cNvPr id="4" name="TextBox 3"/>
+          <p:cNvSpPr txBox="1"/>
+          <p:nvPr/>
+        </p:nvSpPr>
+        <p:spPr>
+          <a:xfrm>
+            <a:off x="640080" y="4128516"/>
+            <a:ext cx="10911535" cy="310896"/>
+          </a:xfrm>
+          <a:prstGeom prst="rect">
+            <a:avLst/>
+          </a:prstGeom>
+          <a:noFill/>
+        </p:spPr>
+        <p:txBody>
+          <a:bodyPr wrap="square">
+            <a:spAutoFit/>
+          </a:bodyPr>
+          <a:lstStyle/>
+          <a:p>
+            <a:pPr algn="ctr"/>
+            <a:r>
+              <a:rPr sz="2000" b="0" i="0">
+                <a:solidFill>
+                  <a:srgbClr val="828282"/>
+                </a:solidFill>
+                <a:latin typeface="Arial"/>
+              </a:rPr>
+              <a:t>義の太陽、光輝きて昇る</a:t>
+            </a:r>
+          </a:p>
+        </p:txBody>
+      </p:sp>
+      <p:sp>
+        <p:nvSpPr>
+          <p:cNvPr id="5" name="TextBox 4"/>
+          <p:cNvSpPr txBox="1"/>
+          <p:nvPr/>
+        </p:nvSpPr>
+        <p:spPr>
+          <a:xfrm>
+            <a:off x="640080" y="4494276"/>
+            <a:ext cx="10911535" cy="310896"/>
+          </a:xfrm>
+          <a:prstGeom prst="rect">
+            <a:avLst/>
+          </a:prstGeom>
+          <a:noFill/>
+        </p:spPr>
+        <p:txBody>
+          <a:bodyPr wrap="square">
+            <a:spAutoFit/>
+          </a:bodyPr>
+          <a:lstStyle/>
+          <a:p>
+            <a:pPr algn="ctr"/>
+            <a:r>
+              <a:rPr sz="2000" b="0" i="0">
+                <a:solidFill>
+                  <a:srgbClr val="828282"/>
+                </a:solidFill>
+                <a:latin typeface="Arial"/>
+              </a:rPr>
+              <a:t>翼に癒しを携えて再び昇る</a:t>
+            </a:r>
+          </a:p>
+        </p:txBody>
+      </p:sp>
     </p:spTree>
   </p:cSld>
   <p:clrMapOvr>
@@ -5269,6 +6704,76 @@
                 <a:latin typeface="Arial"/>
               </a:rPr>
               <a:t>Ouvi o arauto, os anjos cantam</a:t>
+            </a:r>
+          </a:p>
+        </p:txBody>
+      </p:sp>
+      <p:sp>
+        <p:nvSpPr>
+          <p:cNvPr id="4" name="TextBox 3"/>
+          <p:cNvSpPr txBox="1"/>
+          <p:nvPr/>
+        </p:nvSpPr>
+        <p:spPr>
+          <a:xfrm>
+            <a:off x="640080" y="4128516"/>
+            <a:ext cx="10911535" cy="310896"/>
+          </a:xfrm>
+          <a:prstGeom prst="rect">
+            <a:avLst/>
+          </a:prstGeom>
+          <a:noFill/>
+        </p:spPr>
+        <p:txBody>
+          <a:bodyPr wrap="square">
+            <a:spAutoFit/>
+          </a:bodyPr>
+          <a:lstStyle/>
+          <a:p>
+            <a:pPr algn="ctr"/>
+            <a:r>
+              <a:rPr sz="2000" b="0" i="0">
+                <a:solidFill>
+                  <a:srgbClr val="828282"/>
+                </a:solidFill>
+                <a:latin typeface="Arial"/>
+              </a:rPr>
+              <a:t>魂に平和とビジョンを与えたもう</a:t>
+            </a:r>
+          </a:p>
+        </p:txBody>
+      </p:sp>
+      <p:sp>
+        <p:nvSpPr>
+          <p:cNvPr id="5" name="TextBox 4"/>
+          <p:cNvSpPr txBox="1"/>
+          <p:nvPr/>
+        </p:nvSpPr>
+        <p:spPr>
+          <a:xfrm>
+            <a:off x="640080" y="4494276"/>
+            <a:ext cx="10911535" cy="310896"/>
+          </a:xfrm>
+          <a:prstGeom prst="rect">
+            <a:avLst/>
+          </a:prstGeom>
+          <a:noFill/>
+        </p:spPr>
+        <p:txBody>
+          <a:bodyPr wrap="square">
+            <a:spAutoFit/>
+          </a:bodyPr>
+          <a:lstStyle/>
+          <a:p>
+            <a:pPr algn="ctr"/>
+            <a:r>
+              <a:rPr sz="2000" b="0" i="0">
+                <a:solidFill>
+                  <a:srgbClr val="828282"/>
+                </a:solidFill>
+                <a:latin typeface="Arial"/>
+              </a:rPr>
+              <a:t>聞け、御使いたち歌いて</a:t>
             </a:r>
           </a:p>
         </p:txBody>
